--- a/materials/PPT/week03_presentation.pptx
+++ b/materials/PPT/week03_presentation.pptx
@@ -5,7 +5,7 @@
     <p:sldMasterId id="2147483648" r:id="rId1"/>
   </p:sldMasterIdLst>
   <p:notesMasterIdLst>
-    <p:notesMasterId r:id="rId21"/>
+    <p:notesMasterId r:id="rId22"/>
   </p:notesMasterIdLst>
   <p:sldIdLst>
     <p:sldId id="256" r:id="rId2"/>
@@ -19,14 +19,15 @@
     <p:sldId id="263" r:id="rId10"/>
     <p:sldId id="264" r:id="rId11"/>
     <p:sldId id="266" r:id="rId12"/>
-    <p:sldId id="276" r:id="rId13"/>
-    <p:sldId id="267" r:id="rId14"/>
+    <p:sldId id="267" r:id="rId13"/>
+    <p:sldId id="276" r:id="rId14"/>
     <p:sldId id="268" r:id="rId15"/>
     <p:sldId id="269" r:id="rId16"/>
     <p:sldId id="270" r:id="rId17"/>
     <p:sldId id="271" r:id="rId18"/>
     <p:sldId id="272" r:id="rId19"/>
     <p:sldId id="277" r:id="rId20"/>
+    <p:sldId id="278" r:id="rId21"/>
   </p:sldIdLst>
   <p:sldSz cx="9144000" cy="5143500" type="screen16x9"/>
   <p:notesSz cx="5143500" cy="9144000"/>
@@ -524,6 +525,94 @@
   <p:cSld>
     <p:spTree>
       <p:nvGrpSpPr>
+        <p:cNvPr id="1" name=""/>
+        <p:cNvGrpSpPr/>
+        <p:nvPr/>
+      </p:nvGrpSpPr>
+      <p:grpSpPr>
+        <a:xfrm>
+          <a:off x="0" y="0"/>
+          <a:ext cx="0" cy="0"/>
+          <a:chOff x="0" y="0"/>
+          <a:chExt cx="0" cy="0"/>
+        </a:xfrm>
+      </p:grpSpPr>
+      <p:sp>
+        <p:nvSpPr>
+          <p:cNvPr id="2" name="Slide Image Placeholder 1"/>
+          <p:cNvSpPr>
+            <a:spLocks noGrp="1" noRot="1" noChangeAspect="1"/>
+          </p:cNvSpPr>
+          <p:nvPr>
+            <p:ph type="sldImg"/>
+          </p:nvPr>
+        </p:nvSpPr>
+        <p:spPr/>
+      </p:sp>
+      <p:sp>
+        <p:nvSpPr>
+          <p:cNvPr id="3" name="Notes Placeholder 2"/>
+          <p:cNvSpPr>
+            <a:spLocks noGrp="1"/>
+          </p:cNvSpPr>
+          <p:nvPr>
+            <p:ph type="body" idx="1"/>
+          </p:nvPr>
+        </p:nvSpPr>
+        <p:spPr/>
+        <p:txBody>
+          <a:bodyPr/>
+          <a:lstStyle/>
+          <a:p>
+            <a:r>
+              <a:rPr lang="en-US" dirty="0"/>
+              <a:t>퀴즈 시간이에요! 첫 번째, 공중에서 제자리에 멈추는 걸 뭐라고 했죠? 맞아요, 호버링! 양력과 중력이 같을 때예요. 두 번째, 위아래로 움직이는 건? 스로틀! 엘리베이터 버튼처럼요.
+세 번째, 좌우로 기울어지는 건? 롤! 비행기 날개처럼요. 네 번째, 제자리에서 방향 바꾸는 건? 요! 팽이처럼요. 다 맞혔나요? 대단해요!</a:t>
+            </a:r>
+          </a:p>
+        </p:txBody>
+      </p:sp>
+      <p:sp>
+        <p:nvSpPr>
+          <p:cNvPr id="4" name="Slide Number Placeholder 3"/>
+          <p:cNvSpPr>
+            <a:spLocks noGrp="1"/>
+          </p:cNvSpPr>
+          <p:nvPr>
+            <p:ph type="sldNum" sz="quarter" idx="10"/>
+          </p:nvPr>
+        </p:nvSpPr>
+        <p:spPr/>
+        <p:txBody>
+          <a:bodyPr/>
+          <a:lstStyle/>
+          <a:p>
+            <a:fld id="{F7021451-1387-4CA6-816F-3879F97B5CBC}" type="slidenum">
+              <a:rPr lang="en-US"/>
+              <a:t>12</a:t>
+            </a:fld>
+            <a:endParaRPr lang="en-US"/>
+          </a:p>
+        </p:txBody>
+      </p:sp>
+    </p:spTree>
+    <p:extLst>
+      <p:ext uri="{BB962C8B-B14F-4D97-AF65-F5344CB8AC3E}">
+        <p14:creationId xmlns:p14="http://schemas.microsoft.com/office/powerpoint/2010/main" val="1024086991"/>
+      </p:ext>
+    </p:extLst>
+  </p:cSld>
+  <p:clrMapOvr>
+    <a:masterClrMapping/>
+  </p:clrMapOvr>
+</p:notes>
+</file>
+
+<file path=ppt/notesSlides/notesSlide13.xml><?xml version="1.0" encoding="utf-8"?>
+<p:notes xmlns:a="http://schemas.openxmlformats.org/drawingml/2006/main" xmlns:r="http://schemas.openxmlformats.org/officeDocument/2006/relationships" xmlns:p="http://schemas.openxmlformats.org/presentationml/2006/main">
+  <p:cSld>
+    <p:spTree>
+      <p:nvGrpSpPr>
         <p:cNvPr id="1" name="">
           <a:extLst>
             <a:ext uri="{FF2B5EF4-FFF2-40B4-BE49-F238E27FC236}">
@@ -612,7 +701,7 @@
           <a:p>
             <a:fld id="{F7021451-1387-4CA6-816F-3879F97B5CBC}" type="slidenum">
               <a:rPr lang="en-US"/>
-              <a:t>12</a:t>
+              <a:t>13</a:t>
             </a:fld>
             <a:endParaRPr lang="en-US"/>
           </a:p>
@@ -622,94 +711,6 @@
     <p:extLst>
       <p:ext uri="{BB962C8B-B14F-4D97-AF65-F5344CB8AC3E}">
         <p14:creationId xmlns:p14="http://schemas.microsoft.com/office/powerpoint/2010/main" val="3376422990"/>
-      </p:ext>
-    </p:extLst>
-  </p:cSld>
-  <p:clrMapOvr>
-    <a:masterClrMapping/>
-  </p:clrMapOvr>
-</p:notes>
-</file>
-
-<file path=ppt/notesSlides/notesSlide13.xml><?xml version="1.0" encoding="utf-8"?>
-<p:notes xmlns:a="http://schemas.openxmlformats.org/drawingml/2006/main" xmlns:r="http://schemas.openxmlformats.org/officeDocument/2006/relationships" xmlns:p="http://schemas.openxmlformats.org/presentationml/2006/main">
-  <p:cSld>
-    <p:spTree>
-      <p:nvGrpSpPr>
-        <p:cNvPr id="1" name=""/>
-        <p:cNvGrpSpPr/>
-        <p:nvPr/>
-      </p:nvGrpSpPr>
-      <p:grpSpPr>
-        <a:xfrm>
-          <a:off x="0" y="0"/>
-          <a:ext cx="0" cy="0"/>
-          <a:chOff x="0" y="0"/>
-          <a:chExt cx="0" cy="0"/>
-        </a:xfrm>
-      </p:grpSpPr>
-      <p:sp>
-        <p:nvSpPr>
-          <p:cNvPr id="2" name="Slide Image Placeholder 1"/>
-          <p:cNvSpPr>
-            <a:spLocks noGrp="1" noRot="1" noChangeAspect="1"/>
-          </p:cNvSpPr>
-          <p:nvPr>
-            <p:ph type="sldImg"/>
-          </p:nvPr>
-        </p:nvSpPr>
-        <p:spPr/>
-      </p:sp>
-      <p:sp>
-        <p:nvSpPr>
-          <p:cNvPr id="3" name="Notes Placeholder 2"/>
-          <p:cNvSpPr>
-            <a:spLocks noGrp="1"/>
-          </p:cNvSpPr>
-          <p:nvPr>
-            <p:ph type="body" idx="1"/>
-          </p:nvPr>
-        </p:nvSpPr>
-        <p:spPr/>
-        <p:txBody>
-          <a:bodyPr/>
-          <a:lstStyle/>
-          <a:p>
-            <a:r>
-              <a:rPr lang="en-US" dirty="0"/>
-              <a:t>퀴즈 시간이에요! 첫 번째, 공중에서 제자리에 멈추는 걸 뭐라고 했죠? 맞아요, 호버링! 양력과 중력이 같을 때예요. 두 번째, 위아래로 움직이는 건? 스로틀! 엘리베이터 버튼처럼요.
-세 번째, 좌우로 기울어지는 건? 롤! 비행기 날개처럼요. 네 번째, 제자리에서 방향 바꾸는 건? 요! 팽이처럼요. 다 맞혔나요? 대단해요!</a:t>
-            </a:r>
-          </a:p>
-        </p:txBody>
-      </p:sp>
-      <p:sp>
-        <p:nvSpPr>
-          <p:cNvPr id="4" name="Slide Number Placeholder 3"/>
-          <p:cNvSpPr>
-            <a:spLocks noGrp="1"/>
-          </p:cNvSpPr>
-          <p:nvPr>
-            <p:ph type="sldNum" sz="quarter" idx="10"/>
-          </p:nvPr>
-        </p:nvSpPr>
-        <p:spPr/>
-        <p:txBody>
-          <a:bodyPr/>
-          <a:lstStyle/>
-          <a:p>
-            <a:fld id="{F7021451-1387-4CA6-816F-3879F97B5CBC}" type="slidenum">
-              <a:rPr lang="en-US"/>
-              <a:t>13</a:t>
-            </a:fld>
-            <a:endParaRPr lang="en-US"/>
-          </a:p>
-        </p:txBody>
-      </p:sp>
-    </p:spTree>
-    <p:extLst>
-      <p:ext uri="{BB962C8B-B14F-4D97-AF65-F5344CB8AC3E}">
-        <p14:creationId xmlns:p14="http://schemas.microsoft.com/office/powerpoint/2010/main" val="1024086991"/>
       </p:ext>
     </p:extLst>
   </p:cSld>
@@ -1350,6 +1351,118 @@
     <p:extLst>
       <p:ext uri="{BB962C8B-B14F-4D97-AF65-F5344CB8AC3E}">
         <p14:creationId xmlns:p14="http://schemas.microsoft.com/office/powerpoint/2010/main" val="1024086991"/>
+      </p:ext>
+    </p:extLst>
+  </p:cSld>
+  <p:clrMapOvr>
+    <a:masterClrMapping/>
+  </p:clrMapOvr>
+</p:notes>
+</file>
+
+<file path=ppt/notesSlides/notesSlide20.xml><?xml version="1.0" encoding="utf-8"?>
+<p:notes xmlns:a="http://schemas.openxmlformats.org/drawingml/2006/main" xmlns:r="http://schemas.openxmlformats.org/officeDocument/2006/relationships" xmlns:p="http://schemas.openxmlformats.org/presentationml/2006/main">
+  <p:cSld>
+    <p:spTree>
+      <p:nvGrpSpPr>
+        <p:cNvPr id="1" name="">
+          <a:extLst>
+            <a:ext uri="{FF2B5EF4-FFF2-40B4-BE49-F238E27FC236}">
+              <a16:creationId xmlns:a16="http://schemas.microsoft.com/office/drawing/2014/main" id="{CC6BDD72-F56A-1FA6-8C64-FA01D4F21A28}"/>
+            </a:ext>
+          </a:extLst>
+        </p:cNvPr>
+        <p:cNvGrpSpPr/>
+        <p:nvPr/>
+      </p:nvGrpSpPr>
+      <p:grpSpPr>
+        <a:xfrm>
+          <a:off x="0" y="0"/>
+          <a:ext cx="0" cy="0"/>
+          <a:chOff x="0" y="0"/>
+          <a:chExt cx="0" cy="0"/>
+        </a:xfrm>
+      </p:grpSpPr>
+      <p:sp>
+        <p:nvSpPr>
+          <p:cNvPr id="2" name="Slide Image Placeholder 1">
+            <a:extLst>
+              <a:ext uri="{FF2B5EF4-FFF2-40B4-BE49-F238E27FC236}">
+                <a16:creationId xmlns:a16="http://schemas.microsoft.com/office/drawing/2014/main" id="{1E4F0816-BF8D-0228-8432-367825E90E09}"/>
+              </a:ext>
+            </a:extLst>
+          </p:cNvPr>
+          <p:cNvSpPr>
+            <a:spLocks noGrp="1" noRot="1" noChangeAspect="1"/>
+          </p:cNvSpPr>
+          <p:nvPr>
+            <p:ph type="sldImg"/>
+          </p:nvPr>
+        </p:nvSpPr>
+        <p:spPr/>
+      </p:sp>
+      <p:sp>
+        <p:nvSpPr>
+          <p:cNvPr id="3" name="Notes Placeholder 2">
+            <a:extLst>
+              <a:ext uri="{FF2B5EF4-FFF2-40B4-BE49-F238E27FC236}">
+                <a16:creationId xmlns:a16="http://schemas.microsoft.com/office/drawing/2014/main" id="{0078AD5F-58BB-259A-9F7C-41F403C566A9}"/>
+              </a:ext>
+            </a:extLst>
+          </p:cNvPr>
+          <p:cNvSpPr>
+            <a:spLocks noGrp="1"/>
+          </p:cNvSpPr>
+          <p:nvPr>
+            <p:ph type="body" idx="1"/>
+          </p:nvPr>
+        </p:nvSpPr>
+        <p:spPr/>
+        <p:txBody>
+          <a:bodyPr/>
+          <a:lstStyle/>
+          <a:p>
+            <a:r>
+              <a:rPr lang="en-US" dirty="0"/>
+              <a:t>자료형 퀴즈예요! 네 가지 상황에서 어떤 자료형을 써야 할지 골라봐요. 첫 번째, 배터리 잔량은 80% 같은 정수니까 int예요. 두 번째, 고도 2.35m처럼 소수점이 있으면 double이에요.
+세 번째, 드론 이름은 글자니까 string이에요. 네 번째, 날고 있냐 없냐는 두 가지뿐이니 bool이에요. 모두 맞혔나요?</a:t>
+            </a:r>
+          </a:p>
+        </p:txBody>
+      </p:sp>
+      <p:sp>
+        <p:nvSpPr>
+          <p:cNvPr id="4" name="Slide Number Placeholder 3">
+            <a:extLst>
+              <a:ext uri="{FF2B5EF4-FFF2-40B4-BE49-F238E27FC236}">
+                <a16:creationId xmlns:a16="http://schemas.microsoft.com/office/drawing/2014/main" id="{1EBD0340-5D6C-07F9-BA31-CFCDB7B94AA8}"/>
+              </a:ext>
+            </a:extLst>
+          </p:cNvPr>
+          <p:cNvSpPr>
+            <a:spLocks noGrp="1"/>
+          </p:cNvSpPr>
+          <p:nvPr>
+            <p:ph type="sldNum" sz="quarter" idx="10"/>
+          </p:nvPr>
+        </p:nvSpPr>
+        <p:spPr/>
+        <p:txBody>
+          <a:bodyPr/>
+          <a:lstStyle/>
+          <a:p>
+            <a:fld id="{F7021451-1387-4CA6-816F-3879F97B5CBC}" type="slidenum">
+              <a:rPr lang="en-US"/>
+              <a:t>20</a:t>
+            </a:fld>
+            <a:endParaRPr lang="en-US"/>
+          </a:p>
+        </p:txBody>
+      </p:sp>
+    </p:spTree>
+    <p:extLst>
+      <p:ext uri="{BB962C8B-B14F-4D97-AF65-F5344CB8AC3E}">
+        <p14:creationId xmlns:p14="http://schemas.microsoft.com/office/powerpoint/2010/main" val="3237885669"/>
       </p:ext>
     </p:extLst>
   </p:cSld>
@@ -4044,1583 +4157,6 @@
 
 <file path=ppt/slides/slide12.xml><?xml version="1.0" encoding="utf-8"?>
 <p:sld xmlns:a="http://schemas.openxmlformats.org/drawingml/2006/main" xmlns:r="http://schemas.openxmlformats.org/officeDocument/2006/relationships" xmlns:p="http://schemas.openxmlformats.org/presentationml/2006/main">
-  <p:cSld>
-    <p:spTree>
-      <p:nvGrpSpPr>
-        <p:cNvPr id="1" name="">
-          <a:extLst>
-            <a:ext uri="{FF2B5EF4-FFF2-40B4-BE49-F238E27FC236}">
-              <a16:creationId xmlns:a16="http://schemas.microsoft.com/office/drawing/2014/main" id="{133B71E5-BF33-1525-CEEF-A999FB1A0B8D}"/>
-            </a:ext>
-          </a:extLst>
-        </p:cNvPr>
-        <p:cNvGrpSpPr/>
-        <p:nvPr/>
-      </p:nvGrpSpPr>
-      <p:grpSpPr>
-        <a:xfrm>
-          <a:off x="0" y="0"/>
-          <a:ext cx="0" cy="0"/>
-          <a:chOff x="0" y="0"/>
-          <a:chExt cx="0" cy="0"/>
-        </a:xfrm>
-      </p:grpSpPr>
-      <p:sp>
-        <p:nvSpPr>
-          <p:cNvPr id="2" name="Shape 0">
-            <a:extLst>
-              <a:ext uri="{FF2B5EF4-FFF2-40B4-BE49-F238E27FC236}">
-                <a16:creationId xmlns:a16="http://schemas.microsoft.com/office/drawing/2014/main" id="{2C476CB0-DCC1-0C1B-5A74-AEC73AFF1DA7}"/>
-              </a:ext>
-            </a:extLst>
-          </p:cNvPr>
-          <p:cNvSpPr/>
-          <p:nvPr/>
-        </p:nvSpPr>
-        <p:spPr>
-          <a:xfrm>
-            <a:off x="0" y="0"/>
-            <a:ext cx="9144000" cy="658368"/>
-          </a:xfrm>
-          <a:prstGeom prst="rect">
-            <a:avLst/>
-          </a:prstGeom>
-          <a:solidFill>
-            <a:srgbClr val="6D28D9"/>
-          </a:solidFill>
-          <a:ln w="12700">
-            <a:solidFill>
-              <a:srgbClr val="6D28D9"/>
-            </a:solidFill>
-            <a:prstDash val="solid"/>
-          </a:ln>
-        </p:spPr>
-        <p:txBody>
-          <a:bodyPr/>
-          <a:lstStyle/>
-          <a:p>
-            <a:endParaRPr lang="ko-KR" altLang="en-US"/>
-          </a:p>
-        </p:txBody>
-      </p:sp>
-      <p:sp>
-        <p:nvSpPr>
-          <p:cNvPr id="3" name="Shape 1">
-            <a:extLst>
-              <a:ext uri="{FF2B5EF4-FFF2-40B4-BE49-F238E27FC236}">
-                <a16:creationId xmlns:a16="http://schemas.microsoft.com/office/drawing/2014/main" id="{AB4A0610-20D3-E7AE-9BCE-DA68CB222F03}"/>
-              </a:ext>
-            </a:extLst>
-          </p:cNvPr>
-          <p:cNvSpPr/>
-          <p:nvPr/>
-        </p:nvSpPr>
-        <p:spPr>
-          <a:xfrm>
-            <a:off x="0" y="0"/>
-            <a:ext cx="5486400" cy="658368"/>
-          </a:xfrm>
-          <a:prstGeom prst="rect">
-            <a:avLst/>
-          </a:prstGeom>
-          <a:solidFill>
-            <a:srgbClr val="8B5CF6"/>
-          </a:solidFill>
-          <a:ln w="12700">
-            <a:solidFill>
-              <a:srgbClr val="8B5CF6"/>
-            </a:solidFill>
-            <a:prstDash val="solid"/>
-          </a:ln>
-        </p:spPr>
-        <p:txBody>
-          <a:bodyPr/>
-          <a:lstStyle/>
-          <a:p>
-            <a:endParaRPr lang="ko-KR" altLang="en-US"/>
-          </a:p>
-        </p:txBody>
-      </p:sp>
-      <p:sp>
-        <p:nvSpPr>
-          <p:cNvPr id="4" name="Shape 2">
-            <a:extLst>
-              <a:ext uri="{FF2B5EF4-FFF2-40B4-BE49-F238E27FC236}">
-                <a16:creationId xmlns:a16="http://schemas.microsoft.com/office/drawing/2014/main" id="{E16393EF-F151-5EF0-D856-8D87A90B4043}"/>
-              </a:ext>
-            </a:extLst>
-          </p:cNvPr>
-          <p:cNvSpPr/>
-          <p:nvPr/>
-        </p:nvSpPr>
-        <p:spPr>
-          <a:xfrm>
-            <a:off x="3657600" y="0"/>
-            <a:ext cx="3657600" cy="658368"/>
-          </a:xfrm>
-          <a:prstGeom prst="rect">
-            <a:avLst/>
-          </a:prstGeom>
-          <a:solidFill>
-            <a:srgbClr val="8B5CF6">
-              <a:alpha val="50000"/>
-            </a:srgbClr>
-          </a:solidFill>
-          <a:ln w="12700">
-            <a:solidFill>
-              <a:srgbClr val="8B5CF6"/>
-            </a:solidFill>
-            <a:prstDash val="solid"/>
-          </a:ln>
-        </p:spPr>
-        <p:txBody>
-          <a:bodyPr/>
-          <a:lstStyle/>
-          <a:p>
-            <a:endParaRPr lang="ko-KR" altLang="en-US"/>
-          </a:p>
-        </p:txBody>
-      </p:sp>
-      <p:sp>
-        <p:nvSpPr>
-          <p:cNvPr id="5" name="Text 3">
-            <a:extLst>
-              <a:ext uri="{FF2B5EF4-FFF2-40B4-BE49-F238E27FC236}">
-                <a16:creationId xmlns:a16="http://schemas.microsoft.com/office/drawing/2014/main" id="{5A79E3A4-32BE-686C-5CA3-E253DF0746CF}"/>
-              </a:ext>
-            </a:extLst>
-          </p:cNvPr>
-          <p:cNvSpPr/>
-          <p:nvPr/>
-        </p:nvSpPr>
-        <p:spPr>
-          <a:xfrm>
-            <a:off x="320040" y="109728"/>
-            <a:ext cx="457200" cy="420624"/>
-          </a:xfrm>
-          <a:prstGeom prst="rect">
-            <a:avLst/>
-          </a:prstGeom>
-          <a:noFill/>
-          <a:ln/>
-        </p:spPr>
-        <p:txBody>
-          <a:bodyPr wrap="square" rtlCol="0" anchor="ctr"/>
-          <a:lstStyle/>
-          <a:p>
-            <a:pPr marL="0" indent="0" algn="ctr">
-              <a:buNone/>
-            </a:pPr>
-            <a:r>
-              <a:rPr lang="en-US" sz="2200" dirty="0">
-                <a:solidFill>
-                  <a:srgbClr val="000000"/>
-                </a:solidFill>
-                <a:latin typeface="Arial" pitchFamily="34" charset="0"/>
-                <a:ea typeface="Arial" pitchFamily="34" charset="-122"/>
-                <a:cs typeface="Arial" pitchFamily="34" charset="-120"/>
-              </a:rPr>
-              <a:t>❓</a:t>
-            </a:r>
-            <a:endParaRPr lang="en-US" sz="2200" dirty="0"/>
-          </a:p>
-        </p:txBody>
-      </p:sp>
-      <p:sp>
-        <p:nvSpPr>
-          <p:cNvPr id="6" name="Text 4">
-            <a:extLst>
-              <a:ext uri="{FF2B5EF4-FFF2-40B4-BE49-F238E27FC236}">
-                <a16:creationId xmlns:a16="http://schemas.microsoft.com/office/drawing/2014/main" id="{6E7A3E20-B4A1-0240-7504-D0D24146B7C4}"/>
-              </a:ext>
-            </a:extLst>
-          </p:cNvPr>
-          <p:cNvSpPr/>
-          <p:nvPr/>
-        </p:nvSpPr>
-        <p:spPr>
-          <a:xfrm>
-            <a:off x="777240" y="109728"/>
-            <a:ext cx="7132320" cy="420624"/>
-          </a:xfrm>
-          <a:prstGeom prst="rect">
-            <a:avLst/>
-          </a:prstGeom>
-          <a:noFill/>
-          <a:ln/>
-        </p:spPr>
-        <p:txBody>
-          <a:bodyPr wrap="square" rtlCol="0" anchor="ctr"/>
-          <a:lstStyle/>
-          <a:p>
-            <a:pPr marL="0" indent="0" algn="l">
-              <a:buNone/>
-            </a:pPr>
-            <a:r>
-              <a:rPr lang="en-US" sz="2800" b="1" dirty="0">
-                <a:solidFill>
-                  <a:srgbClr val="FFFFFF"/>
-                </a:solidFill>
-                <a:latin typeface="맑은 고딕" pitchFamily="34" charset="0"/>
-                <a:ea typeface="맑은 고딕" pitchFamily="34" charset="-122"/>
-                <a:cs typeface="맑은 고딕" pitchFamily="34" charset="-120"/>
-              </a:rPr>
-              <a:t>퀴즈</a:t>
-            </a:r>
-            <a:endParaRPr lang="en-US" sz="2800" dirty="0"/>
-          </a:p>
-        </p:txBody>
-      </p:sp>
-      <p:sp>
-        <p:nvSpPr>
-          <p:cNvPr id="7" name="Shape 5">
-            <a:extLst>
-              <a:ext uri="{FF2B5EF4-FFF2-40B4-BE49-F238E27FC236}">
-                <a16:creationId xmlns:a16="http://schemas.microsoft.com/office/drawing/2014/main" id="{24C57A7D-1E9C-45AF-78DC-D963CF75EF1F}"/>
-              </a:ext>
-            </a:extLst>
-          </p:cNvPr>
-          <p:cNvSpPr/>
-          <p:nvPr/>
-        </p:nvSpPr>
-        <p:spPr>
-          <a:xfrm>
-            <a:off x="7955280" y="91440"/>
-            <a:ext cx="1005840" cy="320040"/>
-          </a:xfrm>
-          <a:prstGeom prst="roundRect">
-            <a:avLst>
-              <a:gd name="adj" fmla="val 34286"/>
-            </a:avLst>
-          </a:prstGeom>
-          <a:solidFill>
-            <a:srgbClr val="A78BFA"/>
-          </a:solidFill>
-          <a:ln w="12700">
-            <a:solidFill>
-              <a:srgbClr val="A78BFA"/>
-            </a:solidFill>
-            <a:prstDash val="solid"/>
-          </a:ln>
-        </p:spPr>
-        <p:txBody>
-          <a:bodyPr/>
-          <a:lstStyle/>
-          <a:p>
-            <a:endParaRPr lang="ko-KR" altLang="en-US"/>
-          </a:p>
-        </p:txBody>
-      </p:sp>
-      <p:sp>
-        <p:nvSpPr>
-          <p:cNvPr id="8" name="Text 6">
-            <a:extLst>
-              <a:ext uri="{FF2B5EF4-FFF2-40B4-BE49-F238E27FC236}">
-                <a16:creationId xmlns:a16="http://schemas.microsoft.com/office/drawing/2014/main" id="{AC59D4F1-9A48-F7BF-3736-C16506899640}"/>
-              </a:ext>
-            </a:extLst>
-          </p:cNvPr>
-          <p:cNvSpPr/>
-          <p:nvPr/>
-        </p:nvSpPr>
-        <p:spPr>
-          <a:xfrm>
-            <a:off x="7955280" y="109728"/>
-            <a:ext cx="1005840" cy="274320"/>
-          </a:xfrm>
-          <a:prstGeom prst="rect">
-            <a:avLst/>
-          </a:prstGeom>
-          <a:noFill/>
-          <a:ln/>
-        </p:spPr>
-        <p:txBody>
-          <a:bodyPr wrap="square" rtlCol="0" anchor="ctr"/>
-          <a:lstStyle/>
-          <a:p>
-            <a:pPr marL="0" indent="0" algn="ctr">
-              <a:buNone/>
-            </a:pPr>
-            <a:r>
-              <a:rPr lang="en-US" sz="1200" b="1" dirty="0">
-                <a:solidFill>
-                  <a:srgbClr val="FFFFFF"/>
-                </a:solidFill>
-                <a:latin typeface="맑은 고딕" pitchFamily="34" charset="0"/>
-                <a:ea typeface="맑은 고딕" pitchFamily="34" charset="-122"/>
-                <a:cs typeface="맑은 고딕" pitchFamily="34" charset="-120"/>
-              </a:rPr>
-              <a:t>3주차</a:t>
-            </a:r>
-            <a:endParaRPr lang="en-US" sz="1200" dirty="0"/>
-          </a:p>
-        </p:txBody>
-      </p:sp>
-      <p:sp>
-        <p:nvSpPr>
-          <p:cNvPr id="9" name="Shape 7">
-            <a:extLst>
-              <a:ext uri="{FF2B5EF4-FFF2-40B4-BE49-F238E27FC236}">
-                <a16:creationId xmlns:a16="http://schemas.microsoft.com/office/drawing/2014/main" id="{6F048545-5B75-E659-35E7-67592E18EE4B}"/>
-              </a:ext>
-            </a:extLst>
-          </p:cNvPr>
-          <p:cNvSpPr/>
-          <p:nvPr/>
-        </p:nvSpPr>
-        <p:spPr>
-          <a:xfrm>
-            <a:off x="484632" y="1033272"/>
-            <a:ext cx="1920240" cy="3474720"/>
-          </a:xfrm>
-          <a:prstGeom prst="roundRect">
-            <a:avLst>
-              <a:gd name="adj" fmla="val 5714"/>
-            </a:avLst>
-          </a:prstGeom>
-          <a:solidFill>
-            <a:srgbClr val="E2E8F0">
-              <a:alpha val="50000"/>
-            </a:srgbClr>
-          </a:solidFill>
-          <a:ln w="12700">
-            <a:solidFill>
-              <a:srgbClr val="E2E8F0"/>
-            </a:solidFill>
-            <a:prstDash val="solid"/>
-          </a:ln>
-        </p:spPr>
-        <p:txBody>
-          <a:bodyPr/>
-          <a:lstStyle/>
-          <a:p>
-            <a:endParaRPr lang="ko-KR" altLang="en-US"/>
-          </a:p>
-        </p:txBody>
-      </p:sp>
-      <p:sp>
-        <p:nvSpPr>
-          <p:cNvPr id="10" name="Shape 8">
-            <a:extLst>
-              <a:ext uri="{FF2B5EF4-FFF2-40B4-BE49-F238E27FC236}">
-                <a16:creationId xmlns:a16="http://schemas.microsoft.com/office/drawing/2014/main" id="{646AF64C-EB66-D499-E5B3-52CD2AC7D597}"/>
-              </a:ext>
-            </a:extLst>
-          </p:cNvPr>
-          <p:cNvSpPr/>
-          <p:nvPr/>
-        </p:nvSpPr>
-        <p:spPr>
-          <a:xfrm>
-            <a:off x="457200" y="1005840"/>
-            <a:ext cx="1920240" cy="3474720"/>
-          </a:xfrm>
-          <a:prstGeom prst="roundRect">
-            <a:avLst>
-              <a:gd name="adj" fmla="val 5714"/>
-            </a:avLst>
-          </a:prstGeom>
-          <a:solidFill>
-            <a:srgbClr val="FFFFFF"/>
-          </a:solidFill>
-          <a:ln w="12700">
-            <a:solidFill>
-              <a:srgbClr val="E2E8F0"/>
-            </a:solidFill>
-            <a:prstDash val="solid"/>
-          </a:ln>
-        </p:spPr>
-        <p:txBody>
-          <a:bodyPr/>
-          <a:lstStyle/>
-          <a:p>
-            <a:endParaRPr lang="ko-KR" altLang="en-US"/>
-          </a:p>
-        </p:txBody>
-      </p:sp>
-      <p:sp>
-        <p:nvSpPr>
-          <p:cNvPr id="11" name="Shape 9">
-            <a:extLst>
-              <a:ext uri="{FF2B5EF4-FFF2-40B4-BE49-F238E27FC236}">
-                <a16:creationId xmlns:a16="http://schemas.microsoft.com/office/drawing/2014/main" id="{5F15FC25-630D-2F74-28FC-973C8D5EFACE}"/>
-              </a:ext>
-            </a:extLst>
-          </p:cNvPr>
-          <p:cNvSpPr/>
-          <p:nvPr/>
-        </p:nvSpPr>
-        <p:spPr>
-          <a:xfrm>
-            <a:off x="1028700" y="1234440"/>
-            <a:ext cx="777240" cy="457200"/>
-          </a:xfrm>
-          <a:prstGeom prst="ellipse">
-            <a:avLst/>
-          </a:prstGeom>
-          <a:solidFill>
-            <a:srgbClr val="8B5CF6"/>
-          </a:solidFill>
-          <a:ln w="12700">
-            <a:solidFill>
-              <a:srgbClr val="8B5CF6"/>
-            </a:solidFill>
-            <a:prstDash val="solid"/>
-          </a:ln>
-        </p:spPr>
-        <p:txBody>
-          <a:bodyPr/>
-          <a:lstStyle/>
-          <a:p>
-            <a:endParaRPr lang="ko-KR" altLang="en-US"/>
-          </a:p>
-        </p:txBody>
-      </p:sp>
-      <p:sp>
-        <p:nvSpPr>
-          <p:cNvPr id="12" name="Text 10">
-            <a:extLst>
-              <a:ext uri="{FF2B5EF4-FFF2-40B4-BE49-F238E27FC236}">
-                <a16:creationId xmlns:a16="http://schemas.microsoft.com/office/drawing/2014/main" id="{7B3D902F-D345-7340-771A-E29283A6060B}"/>
-              </a:ext>
-            </a:extLst>
-          </p:cNvPr>
-          <p:cNvSpPr/>
-          <p:nvPr/>
-        </p:nvSpPr>
-        <p:spPr>
-          <a:xfrm>
-            <a:off x="1028700" y="1344168"/>
-            <a:ext cx="777240" cy="237744"/>
-          </a:xfrm>
-          <a:prstGeom prst="rect">
-            <a:avLst/>
-          </a:prstGeom>
-          <a:noFill/>
-          <a:ln/>
-        </p:spPr>
-        <p:txBody>
-          <a:bodyPr wrap="square" rtlCol="0" anchor="ctr"/>
-          <a:lstStyle/>
-          <a:p>
-            <a:pPr marL="0" indent="0" algn="ctr">
-              <a:buNone/>
-            </a:pPr>
-            <a:r>
-              <a:rPr lang="en-US" sz="1300" b="1" dirty="0">
-                <a:solidFill>
-                  <a:srgbClr val="FFFFFF"/>
-                </a:solidFill>
-                <a:latin typeface="맑은 고딕" pitchFamily="34" charset="0"/>
-                <a:ea typeface="맑은 고딕" pitchFamily="34" charset="-122"/>
-                <a:cs typeface="맑은 고딕" pitchFamily="34" charset="-120"/>
-              </a:rPr>
-              <a:t>Q1</a:t>
-            </a:r>
-            <a:endParaRPr lang="en-US" sz="1300" dirty="0"/>
-          </a:p>
-        </p:txBody>
-      </p:sp>
-      <p:sp>
-        <p:nvSpPr>
-          <p:cNvPr id="13" name="Text 11">
-            <a:extLst>
-              <a:ext uri="{FF2B5EF4-FFF2-40B4-BE49-F238E27FC236}">
-                <a16:creationId xmlns:a16="http://schemas.microsoft.com/office/drawing/2014/main" id="{86B91CFC-396A-2ACB-8717-47DD1F023C04}"/>
-              </a:ext>
-            </a:extLst>
-          </p:cNvPr>
-          <p:cNvSpPr/>
-          <p:nvPr/>
-        </p:nvSpPr>
-        <p:spPr>
-          <a:xfrm>
-            <a:off x="621792" y="1874520"/>
-            <a:ext cx="1591056" cy="1234440"/>
-          </a:xfrm>
-          <a:prstGeom prst="rect">
-            <a:avLst/>
-          </a:prstGeom>
-          <a:noFill/>
-          <a:ln/>
-        </p:spPr>
-        <p:txBody>
-          <a:bodyPr wrap="square" rtlCol="0" anchor="ctr"/>
-          <a:lstStyle/>
-          <a:p>
-            <a:pPr marL="0" indent="0" algn="ctr">
-              <a:lnSpc>
-                <a:spcPct val="130000"/>
-              </a:lnSpc>
-              <a:buNone/>
-            </a:pPr>
-            <a:r>
-              <a:rPr lang="en-US" sz="1400" dirty="0">
-                <a:solidFill>
-                  <a:srgbClr val="3B0764"/>
-                </a:solidFill>
-                <a:latin typeface="맑은 고딕" pitchFamily="34" charset="0"/>
-                <a:ea typeface="맑은 고딕" pitchFamily="34" charset="-122"/>
-                <a:cs typeface="맑은 고딕" pitchFamily="34" charset="-120"/>
-              </a:rPr>
-              <a:t>Q1. 드론이 공중에서 제자리에 멈추는 상태를 무엇이라 할까? </a:t>
-            </a:r>
-            <a:endParaRPr lang="en-US" sz="1400" dirty="0"/>
-          </a:p>
-        </p:txBody>
-      </p:sp>
-      <p:sp>
-        <p:nvSpPr>
-          <p:cNvPr id="14" name="Shape 12">
-            <a:extLst>
-              <a:ext uri="{FF2B5EF4-FFF2-40B4-BE49-F238E27FC236}">
-                <a16:creationId xmlns:a16="http://schemas.microsoft.com/office/drawing/2014/main" id="{81210A1B-8055-3B7B-52A0-0C9B1F52656E}"/>
-              </a:ext>
-            </a:extLst>
-          </p:cNvPr>
-          <p:cNvSpPr/>
-          <p:nvPr/>
-        </p:nvSpPr>
-        <p:spPr>
-          <a:xfrm>
-            <a:off x="594360" y="3291840"/>
-            <a:ext cx="1645920" cy="914400"/>
-          </a:xfrm>
-          <a:prstGeom prst="roundRect">
-            <a:avLst>
-              <a:gd name="adj" fmla="val 10000"/>
-            </a:avLst>
-          </a:prstGeom>
-          <a:solidFill>
-            <a:srgbClr val="F5F3FF"/>
-          </a:solidFill>
-          <a:ln w="12700">
-            <a:solidFill>
-              <a:srgbClr val="A78BFA"/>
-            </a:solidFill>
-            <a:prstDash val="solid"/>
-          </a:ln>
-        </p:spPr>
-        <p:txBody>
-          <a:bodyPr/>
-          <a:lstStyle/>
-          <a:p>
-            <a:endParaRPr lang="ko-KR" altLang="en-US"/>
-          </a:p>
-        </p:txBody>
-      </p:sp>
-      <p:sp>
-        <p:nvSpPr>
-          <p:cNvPr id="16" name="Text 14">
-            <a:extLst>
-              <a:ext uri="{FF2B5EF4-FFF2-40B4-BE49-F238E27FC236}">
-                <a16:creationId xmlns:a16="http://schemas.microsoft.com/office/drawing/2014/main" id="{56B8434E-B4E4-1676-D195-B912FF84880F}"/>
-              </a:ext>
-            </a:extLst>
-          </p:cNvPr>
-          <p:cNvSpPr/>
-          <p:nvPr/>
-        </p:nvSpPr>
-        <p:spPr>
-          <a:xfrm>
-            <a:off x="685800" y="3657600"/>
-            <a:ext cx="1463040" cy="438912"/>
-          </a:xfrm>
-          <a:prstGeom prst="rect">
-            <a:avLst/>
-          </a:prstGeom>
-          <a:noFill/>
-          <a:ln/>
-        </p:spPr>
-        <p:txBody>
-          <a:bodyPr wrap="square" rtlCol="0" anchor="ctr"/>
-          <a:lstStyle/>
-          <a:p>
-            <a:pPr marL="0" indent="0" algn="ctr">
-              <a:lnSpc>
-                <a:spcPct val="120000"/>
-              </a:lnSpc>
-              <a:buNone/>
-            </a:pPr>
-            <a:endParaRPr lang="en-US" sz="1100" dirty="0"/>
-          </a:p>
-        </p:txBody>
-      </p:sp>
-      <p:sp>
-        <p:nvSpPr>
-          <p:cNvPr id="17" name="Shape 15">
-            <a:extLst>
-              <a:ext uri="{FF2B5EF4-FFF2-40B4-BE49-F238E27FC236}">
-                <a16:creationId xmlns:a16="http://schemas.microsoft.com/office/drawing/2014/main" id="{5A95D4B3-2DDB-F20F-B979-88CC0B7A17E7}"/>
-              </a:ext>
-            </a:extLst>
-          </p:cNvPr>
-          <p:cNvSpPr/>
-          <p:nvPr/>
-        </p:nvSpPr>
-        <p:spPr>
-          <a:xfrm>
-            <a:off x="2587752" y="1033272"/>
-            <a:ext cx="1920240" cy="3474720"/>
-          </a:xfrm>
-          <a:prstGeom prst="roundRect">
-            <a:avLst>
-              <a:gd name="adj" fmla="val 5714"/>
-            </a:avLst>
-          </a:prstGeom>
-          <a:solidFill>
-            <a:srgbClr val="E2E8F0">
-              <a:alpha val="50000"/>
-            </a:srgbClr>
-          </a:solidFill>
-          <a:ln w="12700">
-            <a:solidFill>
-              <a:srgbClr val="E2E8F0"/>
-            </a:solidFill>
-            <a:prstDash val="solid"/>
-          </a:ln>
-        </p:spPr>
-        <p:txBody>
-          <a:bodyPr/>
-          <a:lstStyle/>
-          <a:p>
-            <a:endParaRPr lang="ko-KR" altLang="en-US"/>
-          </a:p>
-        </p:txBody>
-      </p:sp>
-      <p:sp>
-        <p:nvSpPr>
-          <p:cNvPr id="18" name="Shape 16">
-            <a:extLst>
-              <a:ext uri="{FF2B5EF4-FFF2-40B4-BE49-F238E27FC236}">
-                <a16:creationId xmlns:a16="http://schemas.microsoft.com/office/drawing/2014/main" id="{0CF7E550-4D4A-BA08-7898-6EF7C57A52EA}"/>
-              </a:ext>
-            </a:extLst>
-          </p:cNvPr>
-          <p:cNvSpPr/>
-          <p:nvPr/>
-        </p:nvSpPr>
-        <p:spPr>
-          <a:xfrm>
-            <a:off x="2560320" y="1005840"/>
-            <a:ext cx="1920240" cy="3474720"/>
-          </a:xfrm>
-          <a:prstGeom prst="roundRect">
-            <a:avLst>
-              <a:gd name="adj" fmla="val 5714"/>
-            </a:avLst>
-          </a:prstGeom>
-          <a:solidFill>
-            <a:srgbClr val="FFFFFF"/>
-          </a:solidFill>
-          <a:ln w="12700">
-            <a:solidFill>
-              <a:srgbClr val="E2E8F0"/>
-            </a:solidFill>
-            <a:prstDash val="solid"/>
-          </a:ln>
-        </p:spPr>
-        <p:txBody>
-          <a:bodyPr/>
-          <a:lstStyle/>
-          <a:p>
-            <a:endParaRPr lang="ko-KR" altLang="en-US"/>
-          </a:p>
-        </p:txBody>
-      </p:sp>
-      <p:sp>
-        <p:nvSpPr>
-          <p:cNvPr id="19" name="Shape 17">
-            <a:extLst>
-              <a:ext uri="{FF2B5EF4-FFF2-40B4-BE49-F238E27FC236}">
-                <a16:creationId xmlns:a16="http://schemas.microsoft.com/office/drawing/2014/main" id="{0A1135C3-507E-AF97-F4D8-AEAF34A9D530}"/>
-              </a:ext>
-            </a:extLst>
-          </p:cNvPr>
-          <p:cNvSpPr/>
-          <p:nvPr/>
-        </p:nvSpPr>
-        <p:spPr>
-          <a:xfrm>
-            <a:off x="3131820" y="1234440"/>
-            <a:ext cx="777240" cy="457200"/>
-          </a:xfrm>
-          <a:prstGeom prst="ellipse">
-            <a:avLst/>
-          </a:prstGeom>
-          <a:solidFill>
-            <a:srgbClr val="8B5CF6"/>
-          </a:solidFill>
-          <a:ln w="12700">
-            <a:solidFill>
-              <a:srgbClr val="8B5CF6"/>
-            </a:solidFill>
-            <a:prstDash val="solid"/>
-          </a:ln>
-        </p:spPr>
-        <p:txBody>
-          <a:bodyPr/>
-          <a:lstStyle/>
-          <a:p>
-            <a:endParaRPr lang="ko-KR" altLang="en-US"/>
-          </a:p>
-        </p:txBody>
-      </p:sp>
-      <p:sp>
-        <p:nvSpPr>
-          <p:cNvPr id="20" name="Text 18">
-            <a:extLst>
-              <a:ext uri="{FF2B5EF4-FFF2-40B4-BE49-F238E27FC236}">
-                <a16:creationId xmlns:a16="http://schemas.microsoft.com/office/drawing/2014/main" id="{A894DDA6-803F-6C88-4552-DC4506F50091}"/>
-              </a:ext>
-            </a:extLst>
-          </p:cNvPr>
-          <p:cNvSpPr/>
-          <p:nvPr/>
-        </p:nvSpPr>
-        <p:spPr>
-          <a:xfrm>
-            <a:off x="3131820" y="1344168"/>
-            <a:ext cx="777240" cy="237744"/>
-          </a:xfrm>
-          <a:prstGeom prst="rect">
-            <a:avLst/>
-          </a:prstGeom>
-          <a:noFill/>
-          <a:ln/>
-        </p:spPr>
-        <p:txBody>
-          <a:bodyPr wrap="square" rtlCol="0" anchor="ctr"/>
-          <a:lstStyle/>
-          <a:p>
-            <a:pPr marL="0" indent="0" algn="ctr">
-              <a:buNone/>
-            </a:pPr>
-            <a:r>
-              <a:rPr lang="en-US" sz="1300" b="1" dirty="0">
-                <a:solidFill>
-                  <a:srgbClr val="FFFFFF"/>
-                </a:solidFill>
-                <a:latin typeface="맑은 고딕" pitchFamily="34" charset="0"/>
-                <a:ea typeface="맑은 고딕" pitchFamily="34" charset="-122"/>
-                <a:cs typeface="맑은 고딕" pitchFamily="34" charset="-120"/>
-              </a:rPr>
-              <a:t>Q2</a:t>
-            </a:r>
-            <a:endParaRPr lang="en-US" sz="1300" dirty="0"/>
-          </a:p>
-        </p:txBody>
-      </p:sp>
-      <p:sp>
-        <p:nvSpPr>
-          <p:cNvPr id="21" name="Text 19">
-            <a:extLst>
-              <a:ext uri="{FF2B5EF4-FFF2-40B4-BE49-F238E27FC236}">
-                <a16:creationId xmlns:a16="http://schemas.microsoft.com/office/drawing/2014/main" id="{70A45710-5D5F-84AE-DC88-F7B59D21BBB9}"/>
-              </a:ext>
-            </a:extLst>
-          </p:cNvPr>
-          <p:cNvSpPr/>
-          <p:nvPr/>
-        </p:nvSpPr>
-        <p:spPr>
-          <a:xfrm>
-            <a:off x="2724912" y="1874520"/>
-            <a:ext cx="1591056" cy="1234440"/>
-          </a:xfrm>
-          <a:prstGeom prst="rect">
-            <a:avLst/>
-          </a:prstGeom>
-          <a:noFill/>
-          <a:ln/>
-        </p:spPr>
-        <p:txBody>
-          <a:bodyPr wrap="square" rtlCol="0" anchor="ctr"/>
-          <a:lstStyle/>
-          <a:p>
-            <a:pPr marL="0" indent="0" algn="ctr">
-              <a:lnSpc>
-                <a:spcPct val="130000"/>
-              </a:lnSpc>
-              <a:buNone/>
-            </a:pPr>
-            <a:r>
-              <a:rPr lang="en-US" sz="1400" dirty="0">
-                <a:solidFill>
-                  <a:srgbClr val="3B0764"/>
-                </a:solidFill>
-                <a:latin typeface="맑은 고딕" pitchFamily="34" charset="0"/>
-                <a:ea typeface="맑은 고딕" pitchFamily="34" charset="-122"/>
-                <a:cs typeface="맑은 고딕" pitchFamily="34" charset="-120"/>
-              </a:rPr>
-              <a:t>Q2. 드론을 위아래로 움직이는 조종은? </a:t>
-            </a:r>
-            <a:endParaRPr lang="en-US" sz="1400" dirty="0"/>
-          </a:p>
-        </p:txBody>
-      </p:sp>
-      <p:sp>
-        <p:nvSpPr>
-          <p:cNvPr id="22" name="Shape 20">
-            <a:extLst>
-              <a:ext uri="{FF2B5EF4-FFF2-40B4-BE49-F238E27FC236}">
-                <a16:creationId xmlns:a16="http://schemas.microsoft.com/office/drawing/2014/main" id="{86E50DC4-38CC-9C6F-6425-BDBA1D4F4477}"/>
-              </a:ext>
-            </a:extLst>
-          </p:cNvPr>
-          <p:cNvSpPr/>
-          <p:nvPr/>
-        </p:nvSpPr>
-        <p:spPr>
-          <a:xfrm>
-            <a:off x="2697480" y="3291840"/>
-            <a:ext cx="1645920" cy="914400"/>
-          </a:xfrm>
-          <a:prstGeom prst="roundRect">
-            <a:avLst>
-              <a:gd name="adj" fmla="val 10000"/>
-            </a:avLst>
-          </a:prstGeom>
-          <a:solidFill>
-            <a:srgbClr val="F5F3FF"/>
-          </a:solidFill>
-          <a:ln w="12700">
-            <a:solidFill>
-              <a:srgbClr val="A78BFA"/>
-            </a:solidFill>
-            <a:prstDash val="solid"/>
-          </a:ln>
-        </p:spPr>
-        <p:txBody>
-          <a:bodyPr/>
-          <a:lstStyle/>
-          <a:p>
-            <a:endParaRPr lang="ko-KR" altLang="en-US"/>
-          </a:p>
-        </p:txBody>
-      </p:sp>
-      <p:sp>
-        <p:nvSpPr>
-          <p:cNvPr id="24" name="Text 22">
-            <a:extLst>
-              <a:ext uri="{FF2B5EF4-FFF2-40B4-BE49-F238E27FC236}">
-                <a16:creationId xmlns:a16="http://schemas.microsoft.com/office/drawing/2014/main" id="{6C68AD42-1995-CC49-FDD4-4D522632E07F}"/>
-              </a:ext>
-            </a:extLst>
-          </p:cNvPr>
-          <p:cNvSpPr/>
-          <p:nvPr/>
-        </p:nvSpPr>
-        <p:spPr>
-          <a:xfrm>
-            <a:off x="2788920" y="3657600"/>
-            <a:ext cx="1463040" cy="438912"/>
-          </a:xfrm>
-          <a:prstGeom prst="rect">
-            <a:avLst/>
-          </a:prstGeom>
-          <a:noFill/>
-          <a:ln/>
-        </p:spPr>
-        <p:txBody>
-          <a:bodyPr wrap="square" rtlCol="0" anchor="ctr"/>
-          <a:lstStyle/>
-          <a:p>
-            <a:pPr marL="0" indent="0" algn="ctr">
-              <a:lnSpc>
-                <a:spcPct val="120000"/>
-              </a:lnSpc>
-              <a:buNone/>
-            </a:pPr>
-            <a:endParaRPr lang="en-US" sz="1100" dirty="0"/>
-          </a:p>
-        </p:txBody>
-      </p:sp>
-      <p:sp>
-        <p:nvSpPr>
-          <p:cNvPr id="25" name="Shape 23">
-            <a:extLst>
-              <a:ext uri="{FF2B5EF4-FFF2-40B4-BE49-F238E27FC236}">
-                <a16:creationId xmlns:a16="http://schemas.microsoft.com/office/drawing/2014/main" id="{11724AD8-337B-157F-9AF1-2E6B451A4C8C}"/>
-              </a:ext>
-            </a:extLst>
-          </p:cNvPr>
-          <p:cNvSpPr/>
-          <p:nvPr/>
-        </p:nvSpPr>
-        <p:spPr>
-          <a:xfrm>
-            <a:off x="4690872" y="1033272"/>
-            <a:ext cx="1920240" cy="3474720"/>
-          </a:xfrm>
-          <a:prstGeom prst="roundRect">
-            <a:avLst>
-              <a:gd name="adj" fmla="val 5714"/>
-            </a:avLst>
-          </a:prstGeom>
-          <a:solidFill>
-            <a:srgbClr val="E2E8F0">
-              <a:alpha val="50000"/>
-            </a:srgbClr>
-          </a:solidFill>
-          <a:ln w="12700">
-            <a:solidFill>
-              <a:srgbClr val="E2E8F0"/>
-            </a:solidFill>
-            <a:prstDash val="solid"/>
-          </a:ln>
-        </p:spPr>
-        <p:txBody>
-          <a:bodyPr/>
-          <a:lstStyle/>
-          <a:p>
-            <a:endParaRPr lang="ko-KR" altLang="en-US"/>
-          </a:p>
-        </p:txBody>
-      </p:sp>
-      <p:sp>
-        <p:nvSpPr>
-          <p:cNvPr id="26" name="Shape 24">
-            <a:extLst>
-              <a:ext uri="{FF2B5EF4-FFF2-40B4-BE49-F238E27FC236}">
-                <a16:creationId xmlns:a16="http://schemas.microsoft.com/office/drawing/2014/main" id="{AE9D5D04-C4BF-BD8C-B005-04C235A541EE}"/>
-              </a:ext>
-            </a:extLst>
-          </p:cNvPr>
-          <p:cNvSpPr/>
-          <p:nvPr/>
-        </p:nvSpPr>
-        <p:spPr>
-          <a:xfrm>
-            <a:off x="4663440" y="1005840"/>
-            <a:ext cx="1920240" cy="3474720"/>
-          </a:xfrm>
-          <a:prstGeom prst="roundRect">
-            <a:avLst>
-              <a:gd name="adj" fmla="val 5714"/>
-            </a:avLst>
-          </a:prstGeom>
-          <a:solidFill>
-            <a:srgbClr val="FFFFFF"/>
-          </a:solidFill>
-          <a:ln w="12700">
-            <a:solidFill>
-              <a:srgbClr val="E2E8F0"/>
-            </a:solidFill>
-            <a:prstDash val="solid"/>
-          </a:ln>
-        </p:spPr>
-        <p:txBody>
-          <a:bodyPr/>
-          <a:lstStyle/>
-          <a:p>
-            <a:endParaRPr lang="ko-KR" altLang="en-US"/>
-          </a:p>
-        </p:txBody>
-      </p:sp>
-      <p:sp>
-        <p:nvSpPr>
-          <p:cNvPr id="27" name="Shape 25">
-            <a:extLst>
-              <a:ext uri="{FF2B5EF4-FFF2-40B4-BE49-F238E27FC236}">
-                <a16:creationId xmlns:a16="http://schemas.microsoft.com/office/drawing/2014/main" id="{D5D1B63B-4CF9-D0BA-E7B1-FE6BC4001FCB}"/>
-              </a:ext>
-            </a:extLst>
-          </p:cNvPr>
-          <p:cNvSpPr/>
-          <p:nvPr/>
-        </p:nvSpPr>
-        <p:spPr>
-          <a:xfrm>
-            <a:off x="5234940" y="1234440"/>
-            <a:ext cx="777240" cy="457200"/>
-          </a:xfrm>
-          <a:prstGeom prst="ellipse">
-            <a:avLst/>
-          </a:prstGeom>
-          <a:solidFill>
-            <a:srgbClr val="8B5CF6"/>
-          </a:solidFill>
-          <a:ln w="12700">
-            <a:solidFill>
-              <a:srgbClr val="8B5CF6"/>
-            </a:solidFill>
-            <a:prstDash val="solid"/>
-          </a:ln>
-        </p:spPr>
-        <p:txBody>
-          <a:bodyPr/>
-          <a:lstStyle/>
-          <a:p>
-            <a:endParaRPr lang="ko-KR" altLang="en-US"/>
-          </a:p>
-        </p:txBody>
-      </p:sp>
-      <p:sp>
-        <p:nvSpPr>
-          <p:cNvPr id="28" name="Text 26">
-            <a:extLst>
-              <a:ext uri="{FF2B5EF4-FFF2-40B4-BE49-F238E27FC236}">
-                <a16:creationId xmlns:a16="http://schemas.microsoft.com/office/drawing/2014/main" id="{3E091B76-6EF1-46F2-3EC3-58B462BF2D24}"/>
-              </a:ext>
-            </a:extLst>
-          </p:cNvPr>
-          <p:cNvSpPr/>
-          <p:nvPr/>
-        </p:nvSpPr>
-        <p:spPr>
-          <a:xfrm>
-            <a:off x="5234940" y="1344168"/>
-            <a:ext cx="777240" cy="237744"/>
-          </a:xfrm>
-          <a:prstGeom prst="rect">
-            <a:avLst/>
-          </a:prstGeom>
-          <a:noFill/>
-          <a:ln/>
-        </p:spPr>
-        <p:txBody>
-          <a:bodyPr wrap="square" rtlCol="0" anchor="ctr"/>
-          <a:lstStyle/>
-          <a:p>
-            <a:pPr marL="0" indent="0" algn="ctr">
-              <a:buNone/>
-            </a:pPr>
-            <a:r>
-              <a:rPr lang="en-US" sz="1300" b="1" dirty="0">
-                <a:solidFill>
-                  <a:srgbClr val="FFFFFF"/>
-                </a:solidFill>
-                <a:latin typeface="맑은 고딕" pitchFamily="34" charset="0"/>
-                <a:ea typeface="맑은 고딕" pitchFamily="34" charset="-122"/>
-                <a:cs typeface="맑은 고딕" pitchFamily="34" charset="-120"/>
-              </a:rPr>
-              <a:t>Q3</a:t>
-            </a:r>
-            <a:endParaRPr lang="en-US" sz="1300" dirty="0"/>
-          </a:p>
-        </p:txBody>
-      </p:sp>
-      <p:sp>
-        <p:nvSpPr>
-          <p:cNvPr id="29" name="Text 27">
-            <a:extLst>
-              <a:ext uri="{FF2B5EF4-FFF2-40B4-BE49-F238E27FC236}">
-                <a16:creationId xmlns:a16="http://schemas.microsoft.com/office/drawing/2014/main" id="{62434C37-D344-ADD9-3561-27420A463D4E}"/>
-              </a:ext>
-            </a:extLst>
-          </p:cNvPr>
-          <p:cNvSpPr/>
-          <p:nvPr/>
-        </p:nvSpPr>
-        <p:spPr>
-          <a:xfrm>
-            <a:off x="4828032" y="1874520"/>
-            <a:ext cx="1591056" cy="1234440"/>
-          </a:xfrm>
-          <a:prstGeom prst="rect">
-            <a:avLst/>
-          </a:prstGeom>
-          <a:noFill/>
-          <a:ln/>
-        </p:spPr>
-        <p:txBody>
-          <a:bodyPr wrap="square" rtlCol="0" anchor="ctr"/>
-          <a:lstStyle/>
-          <a:p>
-            <a:pPr marL="0" indent="0" algn="ctr">
-              <a:lnSpc>
-                <a:spcPct val="130000"/>
-              </a:lnSpc>
-              <a:buNone/>
-            </a:pPr>
-            <a:r>
-              <a:rPr lang="en-US" sz="1400" dirty="0">
-                <a:solidFill>
-                  <a:srgbClr val="3B0764"/>
-                </a:solidFill>
-                <a:latin typeface="맑은 고딕" pitchFamily="34" charset="0"/>
-                <a:ea typeface="맑은 고딕" pitchFamily="34" charset="-122"/>
-                <a:cs typeface="맑은 고딕" pitchFamily="34" charset="-120"/>
-              </a:rPr>
-              <a:t>Q3. 드론이 좌우로 기울어지는 움직임은? </a:t>
-            </a:r>
-            <a:endParaRPr lang="en-US" sz="1400" dirty="0"/>
-          </a:p>
-        </p:txBody>
-      </p:sp>
-      <p:sp>
-        <p:nvSpPr>
-          <p:cNvPr id="30" name="Shape 28">
-            <a:extLst>
-              <a:ext uri="{FF2B5EF4-FFF2-40B4-BE49-F238E27FC236}">
-                <a16:creationId xmlns:a16="http://schemas.microsoft.com/office/drawing/2014/main" id="{C10C2F49-3EE6-F25D-EDB5-0F541FA8FBC5}"/>
-              </a:ext>
-            </a:extLst>
-          </p:cNvPr>
-          <p:cNvSpPr/>
-          <p:nvPr/>
-        </p:nvSpPr>
-        <p:spPr>
-          <a:xfrm>
-            <a:off x="4800600" y="3291840"/>
-            <a:ext cx="1645920" cy="914400"/>
-          </a:xfrm>
-          <a:prstGeom prst="roundRect">
-            <a:avLst>
-              <a:gd name="adj" fmla="val 10000"/>
-            </a:avLst>
-          </a:prstGeom>
-          <a:solidFill>
-            <a:srgbClr val="F5F3FF"/>
-          </a:solidFill>
-          <a:ln w="12700">
-            <a:solidFill>
-              <a:srgbClr val="A78BFA"/>
-            </a:solidFill>
-            <a:prstDash val="solid"/>
-          </a:ln>
-        </p:spPr>
-        <p:txBody>
-          <a:bodyPr/>
-          <a:lstStyle/>
-          <a:p>
-            <a:endParaRPr lang="ko-KR" altLang="en-US"/>
-          </a:p>
-        </p:txBody>
-      </p:sp>
-      <p:sp>
-        <p:nvSpPr>
-          <p:cNvPr id="32" name="Text 30">
-            <a:extLst>
-              <a:ext uri="{FF2B5EF4-FFF2-40B4-BE49-F238E27FC236}">
-                <a16:creationId xmlns:a16="http://schemas.microsoft.com/office/drawing/2014/main" id="{D0786000-D299-D5E5-571E-BA119A285386}"/>
-              </a:ext>
-            </a:extLst>
-          </p:cNvPr>
-          <p:cNvSpPr/>
-          <p:nvPr/>
-        </p:nvSpPr>
-        <p:spPr>
-          <a:xfrm>
-            <a:off x="4892040" y="3657600"/>
-            <a:ext cx="1463040" cy="438912"/>
-          </a:xfrm>
-          <a:prstGeom prst="rect">
-            <a:avLst/>
-          </a:prstGeom>
-          <a:noFill/>
-          <a:ln/>
-        </p:spPr>
-        <p:txBody>
-          <a:bodyPr wrap="square" rtlCol="0" anchor="ctr"/>
-          <a:lstStyle/>
-          <a:p>
-            <a:pPr marL="0" indent="0" algn="ctr">
-              <a:lnSpc>
-                <a:spcPct val="120000"/>
-              </a:lnSpc>
-              <a:buNone/>
-            </a:pPr>
-            <a:endParaRPr lang="en-US" sz="1100" dirty="0"/>
-          </a:p>
-        </p:txBody>
-      </p:sp>
-      <p:sp>
-        <p:nvSpPr>
-          <p:cNvPr id="33" name="Shape 31">
-            <a:extLst>
-              <a:ext uri="{FF2B5EF4-FFF2-40B4-BE49-F238E27FC236}">
-                <a16:creationId xmlns:a16="http://schemas.microsoft.com/office/drawing/2014/main" id="{3D084A90-B46A-0A5E-222F-6C193A98D580}"/>
-              </a:ext>
-            </a:extLst>
-          </p:cNvPr>
-          <p:cNvSpPr/>
-          <p:nvPr/>
-        </p:nvSpPr>
-        <p:spPr>
-          <a:xfrm>
-            <a:off x="6793992" y="1033272"/>
-            <a:ext cx="1920240" cy="3474720"/>
-          </a:xfrm>
-          <a:prstGeom prst="roundRect">
-            <a:avLst>
-              <a:gd name="adj" fmla="val 5714"/>
-            </a:avLst>
-          </a:prstGeom>
-          <a:solidFill>
-            <a:srgbClr val="E2E8F0">
-              <a:alpha val="50000"/>
-            </a:srgbClr>
-          </a:solidFill>
-          <a:ln w="12700">
-            <a:solidFill>
-              <a:srgbClr val="E2E8F0"/>
-            </a:solidFill>
-            <a:prstDash val="solid"/>
-          </a:ln>
-        </p:spPr>
-        <p:txBody>
-          <a:bodyPr/>
-          <a:lstStyle/>
-          <a:p>
-            <a:endParaRPr lang="ko-KR" altLang="en-US"/>
-          </a:p>
-        </p:txBody>
-      </p:sp>
-      <p:sp>
-        <p:nvSpPr>
-          <p:cNvPr id="34" name="Shape 32">
-            <a:extLst>
-              <a:ext uri="{FF2B5EF4-FFF2-40B4-BE49-F238E27FC236}">
-                <a16:creationId xmlns:a16="http://schemas.microsoft.com/office/drawing/2014/main" id="{E456C95B-5A56-1D0E-354D-61109183BD71}"/>
-              </a:ext>
-            </a:extLst>
-          </p:cNvPr>
-          <p:cNvSpPr/>
-          <p:nvPr/>
-        </p:nvSpPr>
-        <p:spPr>
-          <a:xfrm>
-            <a:off x="6766560" y="1005840"/>
-            <a:ext cx="1920240" cy="3474720"/>
-          </a:xfrm>
-          <a:prstGeom prst="roundRect">
-            <a:avLst>
-              <a:gd name="adj" fmla="val 5714"/>
-            </a:avLst>
-          </a:prstGeom>
-          <a:solidFill>
-            <a:srgbClr val="FFFFFF"/>
-          </a:solidFill>
-          <a:ln w="12700">
-            <a:solidFill>
-              <a:srgbClr val="E2E8F0"/>
-            </a:solidFill>
-            <a:prstDash val="solid"/>
-          </a:ln>
-        </p:spPr>
-        <p:txBody>
-          <a:bodyPr/>
-          <a:lstStyle/>
-          <a:p>
-            <a:endParaRPr lang="ko-KR" altLang="en-US"/>
-          </a:p>
-        </p:txBody>
-      </p:sp>
-      <p:sp>
-        <p:nvSpPr>
-          <p:cNvPr id="35" name="Shape 33">
-            <a:extLst>
-              <a:ext uri="{FF2B5EF4-FFF2-40B4-BE49-F238E27FC236}">
-                <a16:creationId xmlns:a16="http://schemas.microsoft.com/office/drawing/2014/main" id="{A994AAF5-E8D6-C72A-28DA-3F0D76A6C10D}"/>
-              </a:ext>
-            </a:extLst>
-          </p:cNvPr>
-          <p:cNvSpPr/>
-          <p:nvPr/>
-        </p:nvSpPr>
-        <p:spPr>
-          <a:xfrm>
-            <a:off x="7338060" y="1234440"/>
-            <a:ext cx="777240" cy="457200"/>
-          </a:xfrm>
-          <a:prstGeom prst="ellipse">
-            <a:avLst/>
-          </a:prstGeom>
-          <a:solidFill>
-            <a:srgbClr val="8B5CF6"/>
-          </a:solidFill>
-          <a:ln w="12700">
-            <a:solidFill>
-              <a:srgbClr val="8B5CF6"/>
-            </a:solidFill>
-            <a:prstDash val="solid"/>
-          </a:ln>
-        </p:spPr>
-        <p:txBody>
-          <a:bodyPr/>
-          <a:lstStyle/>
-          <a:p>
-            <a:endParaRPr lang="ko-KR" altLang="en-US"/>
-          </a:p>
-        </p:txBody>
-      </p:sp>
-      <p:sp>
-        <p:nvSpPr>
-          <p:cNvPr id="36" name="Text 34">
-            <a:extLst>
-              <a:ext uri="{FF2B5EF4-FFF2-40B4-BE49-F238E27FC236}">
-                <a16:creationId xmlns:a16="http://schemas.microsoft.com/office/drawing/2014/main" id="{06881CDD-F972-CA4B-BDC2-DD527697F2F4}"/>
-              </a:ext>
-            </a:extLst>
-          </p:cNvPr>
-          <p:cNvSpPr/>
-          <p:nvPr/>
-        </p:nvSpPr>
-        <p:spPr>
-          <a:xfrm>
-            <a:off x="7338060" y="1344168"/>
-            <a:ext cx="777240" cy="237744"/>
-          </a:xfrm>
-          <a:prstGeom prst="rect">
-            <a:avLst/>
-          </a:prstGeom>
-          <a:noFill/>
-          <a:ln/>
-        </p:spPr>
-        <p:txBody>
-          <a:bodyPr wrap="square" rtlCol="0" anchor="ctr"/>
-          <a:lstStyle/>
-          <a:p>
-            <a:pPr marL="0" indent="0" algn="ctr">
-              <a:buNone/>
-            </a:pPr>
-            <a:r>
-              <a:rPr lang="en-US" sz="1300" b="1" dirty="0">
-                <a:solidFill>
-                  <a:srgbClr val="FFFFFF"/>
-                </a:solidFill>
-                <a:latin typeface="맑은 고딕" pitchFamily="34" charset="0"/>
-                <a:ea typeface="맑은 고딕" pitchFamily="34" charset="-122"/>
-                <a:cs typeface="맑은 고딕" pitchFamily="34" charset="-120"/>
-              </a:rPr>
-              <a:t>Q4</a:t>
-            </a:r>
-            <a:endParaRPr lang="en-US" sz="1300" dirty="0"/>
-          </a:p>
-        </p:txBody>
-      </p:sp>
-      <p:sp>
-        <p:nvSpPr>
-          <p:cNvPr id="37" name="Text 35">
-            <a:extLst>
-              <a:ext uri="{FF2B5EF4-FFF2-40B4-BE49-F238E27FC236}">
-                <a16:creationId xmlns:a16="http://schemas.microsoft.com/office/drawing/2014/main" id="{03CBA4DB-D961-CC2F-67FD-92E301DAF0F4}"/>
-              </a:ext>
-            </a:extLst>
-          </p:cNvPr>
-          <p:cNvSpPr/>
-          <p:nvPr/>
-        </p:nvSpPr>
-        <p:spPr>
-          <a:xfrm>
-            <a:off x="6931152" y="1874520"/>
-            <a:ext cx="1591056" cy="1234440"/>
-          </a:xfrm>
-          <a:prstGeom prst="rect">
-            <a:avLst/>
-          </a:prstGeom>
-          <a:noFill/>
-          <a:ln/>
-        </p:spPr>
-        <p:txBody>
-          <a:bodyPr wrap="square" rtlCol="0" anchor="ctr"/>
-          <a:lstStyle/>
-          <a:p>
-            <a:pPr marL="0" indent="0" algn="ctr">
-              <a:lnSpc>
-                <a:spcPct val="130000"/>
-              </a:lnSpc>
-              <a:buNone/>
-            </a:pPr>
-            <a:r>
-              <a:rPr lang="en-US" sz="1400" dirty="0">
-                <a:solidFill>
-                  <a:srgbClr val="3B0764"/>
-                </a:solidFill>
-                <a:latin typeface="맑은 고딕" pitchFamily="34" charset="0"/>
-                <a:ea typeface="맑은 고딕" pitchFamily="34" charset="-122"/>
-                <a:cs typeface="맑은 고딕" pitchFamily="34" charset="-120"/>
-              </a:rPr>
-              <a:t>Q4. 드론이 제자리에서 방향을 바꾸는 움직임은? (요)</a:t>
-            </a:r>
-            <a:endParaRPr lang="en-US" sz="1400" dirty="0"/>
-          </a:p>
-        </p:txBody>
-      </p:sp>
-      <p:sp>
-        <p:nvSpPr>
-          <p:cNvPr id="38" name="Shape 36">
-            <a:extLst>
-              <a:ext uri="{FF2B5EF4-FFF2-40B4-BE49-F238E27FC236}">
-                <a16:creationId xmlns:a16="http://schemas.microsoft.com/office/drawing/2014/main" id="{629AF6F8-63F4-8238-B6CB-D3918DF4CD66}"/>
-              </a:ext>
-            </a:extLst>
-          </p:cNvPr>
-          <p:cNvSpPr/>
-          <p:nvPr/>
-        </p:nvSpPr>
-        <p:spPr>
-          <a:xfrm>
-            <a:off x="6903720" y="3291840"/>
-            <a:ext cx="1645920" cy="914400"/>
-          </a:xfrm>
-          <a:prstGeom prst="roundRect">
-            <a:avLst>
-              <a:gd name="adj" fmla="val 10000"/>
-            </a:avLst>
-          </a:prstGeom>
-          <a:solidFill>
-            <a:srgbClr val="F5F3FF"/>
-          </a:solidFill>
-          <a:ln w="12700">
-            <a:solidFill>
-              <a:srgbClr val="A78BFA"/>
-            </a:solidFill>
-            <a:prstDash val="solid"/>
-          </a:ln>
-        </p:spPr>
-        <p:txBody>
-          <a:bodyPr/>
-          <a:lstStyle/>
-          <a:p>
-            <a:endParaRPr lang="ko-KR" altLang="en-US"/>
-          </a:p>
-        </p:txBody>
-      </p:sp>
-      <p:sp>
-        <p:nvSpPr>
-          <p:cNvPr id="40" name="Text 38">
-            <a:extLst>
-              <a:ext uri="{FF2B5EF4-FFF2-40B4-BE49-F238E27FC236}">
-                <a16:creationId xmlns:a16="http://schemas.microsoft.com/office/drawing/2014/main" id="{EA6AD924-3B47-3946-1CCE-20138CEAB917}"/>
-              </a:ext>
-            </a:extLst>
-          </p:cNvPr>
-          <p:cNvSpPr/>
-          <p:nvPr/>
-        </p:nvSpPr>
-        <p:spPr>
-          <a:xfrm>
-            <a:off x="6995160" y="3657600"/>
-            <a:ext cx="1463040" cy="438912"/>
-          </a:xfrm>
-          <a:prstGeom prst="rect">
-            <a:avLst/>
-          </a:prstGeom>
-          <a:noFill/>
-          <a:ln/>
-        </p:spPr>
-        <p:txBody>
-          <a:bodyPr wrap="square" rtlCol="0" anchor="ctr"/>
-          <a:lstStyle/>
-          <a:p>
-            <a:pPr marL="0" indent="0" algn="ctr">
-              <a:lnSpc>
-                <a:spcPct val="120000"/>
-              </a:lnSpc>
-              <a:buNone/>
-            </a:pPr>
-            <a:endParaRPr lang="en-US" sz="1100" dirty="0"/>
-          </a:p>
-        </p:txBody>
-      </p:sp>
-      <p:sp>
-        <p:nvSpPr>
-          <p:cNvPr id="42" name="Text 39">
-            <a:extLst>
-              <a:ext uri="{FF2B5EF4-FFF2-40B4-BE49-F238E27FC236}">
-                <a16:creationId xmlns:a16="http://schemas.microsoft.com/office/drawing/2014/main" id="{8D662130-A569-FF82-B199-CBC8D7B713A2}"/>
-              </a:ext>
-            </a:extLst>
-          </p:cNvPr>
-          <p:cNvSpPr/>
-          <p:nvPr/>
-        </p:nvSpPr>
-        <p:spPr>
-          <a:xfrm>
-            <a:off x="274320" y="4800600"/>
-            <a:ext cx="2286000" cy="274320"/>
-          </a:xfrm>
-          <a:prstGeom prst="rect">
-            <a:avLst/>
-          </a:prstGeom>
-          <a:noFill/>
-          <a:ln/>
-        </p:spPr>
-        <p:txBody>
-          <a:bodyPr wrap="square" rtlCol="0" anchor="b"/>
-          <a:lstStyle/>
-          <a:p>
-            <a:pPr marL="0" indent="0" algn="l">
-              <a:buNone/>
-            </a:pPr>
-            <a:r>
-              <a:rPr lang="en-US" sz="900" dirty="0">
-                <a:solidFill>
-                  <a:srgbClr val="A0AEC0"/>
-                </a:solidFill>
-                <a:latin typeface="맑은 고딕" pitchFamily="34" charset="0"/>
-                <a:ea typeface="맑은 고딕" pitchFamily="34" charset="-122"/>
-                <a:cs typeface="맑은 고딕" pitchFamily="34" charset="-120"/>
-              </a:rPr>
-              <a:t>드론 코딩 교실</a:t>
-            </a:r>
-            <a:endParaRPr lang="en-US" sz="900" dirty="0"/>
-          </a:p>
-        </p:txBody>
-      </p:sp>
-      <p:sp>
-        <p:nvSpPr>
-          <p:cNvPr id="43" name="Text 40">
-            <a:extLst>
-              <a:ext uri="{FF2B5EF4-FFF2-40B4-BE49-F238E27FC236}">
-                <a16:creationId xmlns:a16="http://schemas.microsoft.com/office/drawing/2014/main" id="{AB69E53D-A9BF-AC06-B02C-734E9DB8F1F3}"/>
-              </a:ext>
-            </a:extLst>
-          </p:cNvPr>
-          <p:cNvSpPr/>
-          <p:nvPr/>
-        </p:nvSpPr>
-        <p:spPr>
-          <a:xfrm>
-            <a:off x="6858000" y="4800600"/>
-            <a:ext cx="2011680" cy="274320"/>
-          </a:xfrm>
-          <a:prstGeom prst="rect">
-            <a:avLst/>
-          </a:prstGeom>
-          <a:noFill/>
-          <a:ln/>
-        </p:spPr>
-        <p:txBody>
-          <a:bodyPr wrap="square" rtlCol="0" anchor="b"/>
-          <a:lstStyle/>
-          <a:p>
-            <a:pPr marL="0" indent="0" algn="r">
-              <a:buNone/>
-            </a:pPr>
-            <a:r>
-              <a:rPr lang="en-US" sz="900" dirty="0">
-                <a:solidFill>
-                  <a:srgbClr val="A0AEC0"/>
-                </a:solidFill>
-                <a:latin typeface="맑은 고딕" pitchFamily="34" charset="0"/>
-                <a:ea typeface="맑은 고딕" pitchFamily="34" charset="-122"/>
-                <a:cs typeface="맑은 고딕" pitchFamily="34" charset="-120"/>
-              </a:rPr>
-              <a:t>12 / 17</a:t>
-            </a:r>
-            <a:endParaRPr lang="en-US" sz="900" dirty="0"/>
-          </a:p>
-        </p:txBody>
-      </p:sp>
-    </p:spTree>
-    <p:extLst>
-      <p:ext uri="{BB962C8B-B14F-4D97-AF65-F5344CB8AC3E}">
-        <p14:creationId xmlns:p14="http://schemas.microsoft.com/office/powerpoint/2010/main" val="1455325911"/>
-      </p:ext>
-    </p:extLst>
-  </p:cSld>
-  <p:clrMapOvr>
-    <a:masterClrMapping/>
-  </p:clrMapOvr>
-</p:sld>
-</file>
-
-<file path=ppt/slides/slide13.xml><?xml version="1.0" encoding="utf-8"?>
-<p:sld xmlns:a="http://schemas.openxmlformats.org/drawingml/2006/main" xmlns:r="http://schemas.openxmlformats.org/officeDocument/2006/relationships" xmlns:p="http://schemas.openxmlformats.org/presentationml/2006/main">
   <p:cSld name="Slide 12">
     <p:bg>
       <p:bgPr>
@@ -7286,6 +5822,1583 @@
         </p:txBody>
       </p:sp>
     </p:spTree>
+  </p:cSld>
+  <p:clrMapOvr>
+    <a:masterClrMapping/>
+  </p:clrMapOvr>
+</p:sld>
+</file>
+
+<file path=ppt/slides/slide13.xml><?xml version="1.0" encoding="utf-8"?>
+<p:sld xmlns:a="http://schemas.openxmlformats.org/drawingml/2006/main" xmlns:r="http://schemas.openxmlformats.org/officeDocument/2006/relationships" xmlns:p="http://schemas.openxmlformats.org/presentationml/2006/main">
+  <p:cSld>
+    <p:spTree>
+      <p:nvGrpSpPr>
+        <p:cNvPr id="1" name="">
+          <a:extLst>
+            <a:ext uri="{FF2B5EF4-FFF2-40B4-BE49-F238E27FC236}">
+              <a16:creationId xmlns:a16="http://schemas.microsoft.com/office/drawing/2014/main" id="{133B71E5-BF33-1525-CEEF-A999FB1A0B8D}"/>
+            </a:ext>
+          </a:extLst>
+        </p:cNvPr>
+        <p:cNvGrpSpPr/>
+        <p:nvPr/>
+      </p:nvGrpSpPr>
+      <p:grpSpPr>
+        <a:xfrm>
+          <a:off x="0" y="0"/>
+          <a:ext cx="0" cy="0"/>
+          <a:chOff x="0" y="0"/>
+          <a:chExt cx="0" cy="0"/>
+        </a:xfrm>
+      </p:grpSpPr>
+      <p:sp>
+        <p:nvSpPr>
+          <p:cNvPr id="2" name="Shape 0">
+            <a:extLst>
+              <a:ext uri="{FF2B5EF4-FFF2-40B4-BE49-F238E27FC236}">
+                <a16:creationId xmlns:a16="http://schemas.microsoft.com/office/drawing/2014/main" id="{2C476CB0-DCC1-0C1B-5A74-AEC73AFF1DA7}"/>
+              </a:ext>
+            </a:extLst>
+          </p:cNvPr>
+          <p:cNvSpPr/>
+          <p:nvPr/>
+        </p:nvSpPr>
+        <p:spPr>
+          <a:xfrm>
+            <a:off x="0" y="0"/>
+            <a:ext cx="9144000" cy="658368"/>
+          </a:xfrm>
+          <a:prstGeom prst="rect">
+            <a:avLst/>
+          </a:prstGeom>
+          <a:solidFill>
+            <a:srgbClr val="6D28D9"/>
+          </a:solidFill>
+          <a:ln w="12700">
+            <a:solidFill>
+              <a:srgbClr val="6D28D9"/>
+            </a:solidFill>
+            <a:prstDash val="solid"/>
+          </a:ln>
+        </p:spPr>
+        <p:txBody>
+          <a:bodyPr/>
+          <a:lstStyle/>
+          <a:p>
+            <a:endParaRPr lang="ko-KR" altLang="en-US"/>
+          </a:p>
+        </p:txBody>
+      </p:sp>
+      <p:sp>
+        <p:nvSpPr>
+          <p:cNvPr id="3" name="Shape 1">
+            <a:extLst>
+              <a:ext uri="{FF2B5EF4-FFF2-40B4-BE49-F238E27FC236}">
+                <a16:creationId xmlns:a16="http://schemas.microsoft.com/office/drawing/2014/main" id="{AB4A0610-20D3-E7AE-9BCE-DA68CB222F03}"/>
+              </a:ext>
+            </a:extLst>
+          </p:cNvPr>
+          <p:cNvSpPr/>
+          <p:nvPr/>
+        </p:nvSpPr>
+        <p:spPr>
+          <a:xfrm>
+            <a:off x="0" y="0"/>
+            <a:ext cx="5486400" cy="658368"/>
+          </a:xfrm>
+          <a:prstGeom prst="rect">
+            <a:avLst/>
+          </a:prstGeom>
+          <a:solidFill>
+            <a:srgbClr val="8B5CF6"/>
+          </a:solidFill>
+          <a:ln w="12700">
+            <a:solidFill>
+              <a:srgbClr val="8B5CF6"/>
+            </a:solidFill>
+            <a:prstDash val="solid"/>
+          </a:ln>
+        </p:spPr>
+        <p:txBody>
+          <a:bodyPr/>
+          <a:lstStyle/>
+          <a:p>
+            <a:endParaRPr lang="ko-KR" altLang="en-US"/>
+          </a:p>
+        </p:txBody>
+      </p:sp>
+      <p:sp>
+        <p:nvSpPr>
+          <p:cNvPr id="4" name="Shape 2">
+            <a:extLst>
+              <a:ext uri="{FF2B5EF4-FFF2-40B4-BE49-F238E27FC236}">
+                <a16:creationId xmlns:a16="http://schemas.microsoft.com/office/drawing/2014/main" id="{E16393EF-F151-5EF0-D856-8D87A90B4043}"/>
+              </a:ext>
+            </a:extLst>
+          </p:cNvPr>
+          <p:cNvSpPr/>
+          <p:nvPr/>
+        </p:nvSpPr>
+        <p:spPr>
+          <a:xfrm>
+            <a:off x="3657600" y="0"/>
+            <a:ext cx="3657600" cy="658368"/>
+          </a:xfrm>
+          <a:prstGeom prst="rect">
+            <a:avLst/>
+          </a:prstGeom>
+          <a:solidFill>
+            <a:srgbClr val="8B5CF6">
+              <a:alpha val="50000"/>
+            </a:srgbClr>
+          </a:solidFill>
+          <a:ln w="12700">
+            <a:solidFill>
+              <a:srgbClr val="8B5CF6"/>
+            </a:solidFill>
+            <a:prstDash val="solid"/>
+          </a:ln>
+        </p:spPr>
+        <p:txBody>
+          <a:bodyPr/>
+          <a:lstStyle/>
+          <a:p>
+            <a:endParaRPr lang="ko-KR" altLang="en-US"/>
+          </a:p>
+        </p:txBody>
+      </p:sp>
+      <p:sp>
+        <p:nvSpPr>
+          <p:cNvPr id="5" name="Text 3">
+            <a:extLst>
+              <a:ext uri="{FF2B5EF4-FFF2-40B4-BE49-F238E27FC236}">
+                <a16:creationId xmlns:a16="http://schemas.microsoft.com/office/drawing/2014/main" id="{5A79E3A4-32BE-686C-5CA3-E253DF0746CF}"/>
+              </a:ext>
+            </a:extLst>
+          </p:cNvPr>
+          <p:cNvSpPr/>
+          <p:nvPr/>
+        </p:nvSpPr>
+        <p:spPr>
+          <a:xfrm>
+            <a:off x="320040" y="109728"/>
+            <a:ext cx="457200" cy="420624"/>
+          </a:xfrm>
+          <a:prstGeom prst="rect">
+            <a:avLst/>
+          </a:prstGeom>
+          <a:noFill/>
+          <a:ln/>
+        </p:spPr>
+        <p:txBody>
+          <a:bodyPr wrap="square" rtlCol="0" anchor="ctr"/>
+          <a:lstStyle/>
+          <a:p>
+            <a:pPr marL="0" indent="0" algn="ctr">
+              <a:buNone/>
+            </a:pPr>
+            <a:r>
+              <a:rPr lang="en-US" sz="2200" dirty="0">
+                <a:solidFill>
+                  <a:srgbClr val="000000"/>
+                </a:solidFill>
+                <a:latin typeface="Arial" pitchFamily="34" charset="0"/>
+                <a:ea typeface="Arial" pitchFamily="34" charset="-122"/>
+                <a:cs typeface="Arial" pitchFamily="34" charset="-120"/>
+              </a:rPr>
+              <a:t>❓</a:t>
+            </a:r>
+            <a:endParaRPr lang="en-US" sz="2200" dirty="0"/>
+          </a:p>
+        </p:txBody>
+      </p:sp>
+      <p:sp>
+        <p:nvSpPr>
+          <p:cNvPr id="6" name="Text 4">
+            <a:extLst>
+              <a:ext uri="{FF2B5EF4-FFF2-40B4-BE49-F238E27FC236}">
+                <a16:creationId xmlns:a16="http://schemas.microsoft.com/office/drawing/2014/main" id="{6E7A3E20-B4A1-0240-7504-D0D24146B7C4}"/>
+              </a:ext>
+            </a:extLst>
+          </p:cNvPr>
+          <p:cNvSpPr/>
+          <p:nvPr/>
+        </p:nvSpPr>
+        <p:spPr>
+          <a:xfrm>
+            <a:off x="777240" y="109728"/>
+            <a:ext cx="7132320" cy="420624"/>
+          </a:xfrm>
+          <a:prstGeom prst="rect">
+            <a:avLst/>
+          </a:prstGeom>
+          <a:noFill/>
+          <a:ln/>
+        </p:spPr>
+        <p:txBody>
+          <a:bodyPr wrap="square" rtlCol="0" anchor="ctr"/>
+          <a:lstStyle/>
+          <a:p>
+            <a:pPr marL="0" indent="0" algn="l">
+              <a:buNone/>
+            </a:pPr>
+            <a:r>
+              <a:rPr lang="en-US" sz="2800" b="1" dirty="0">
+                <a:solidFill>
+                  <a:srgbClr val="FFFFFF"/>
+                </a:solidFill>
+                <a:latin typeface="맑은 고딕" pitchFamily="34" charset="0"/>
+                <a:ea typeface="맑은 고딕" pitchFamily="34" charset="-122"/>
+                <a:cs typeface="맑은 고딕" pitchFamily="34" charset="-120"/>
+              </a:rPr>
+              <a:t>퀴즈</a:t>
+            </a:r>
+            <a:endParaRPr lang="en-US" sz="2800" dirty="0"/>
+          </a:p>
+        </p:txBody>
+      </p:sp>
+      <p:sp>
+        <p:nvSpPr>
+          <p:cNvPr id="7" name="Shape 5">
+            <a:extLst>
+              <a:ext uri="{FF2B5EF4-FFF2-40B4-BE49-F238E27FC236}">
+                <a16:creationId xmlns:a16="http://schemas.microsoft.com/office/drawing/2014/main" id="{24C57A7D-1E9C-45AF-78DC-D963CF75EF1F}"/>
+              </a:ext>
+            </a:extLst>
+          </p:cNvPr>
+          <p:cNvSpPr/>
+          <p:nvPr/>
+        </p:nvSpPr>
+        <p:spPr>
+          <a:xfrm>
+            <a:off x="7955280" y="91440"/>
+            <a:ext cx="1005840" cy="320040"/>
+          </a:xfrm>
+          <a:prstGeom prst="roundRect">
+            <a:avLst>
+              <a:gd name="adj" fmla="val 34286"/>
+            </a:avLst>
+          </a:prstGeom>
+          <a:solidFill>
+            <a:srgbClr val="A78BFA"/>
+          </a:solidFill>
+          <a:ln w="12700">
+            <a:solidFill>
+              <a:srgbClr val="A78BFA"/>
+            </a:solidFill>
+            <a:prstDash val="solid"/>
+          </a:ln>
+        </p:spPr>
+        <p:txBody>
+          <a:bodyPr/>
+          <a:lstStyle/>
+          <a:p>
+            <a:endParaRPr lang="ko-KR" altLang="en-US"/>
+          </a:p>
+        </p:txBody>
+      </p:sp>
+      <p:sp>
+        <p:nvSpPr>
+          <p:cNvPr id="8" name="Text 6">
+            <a:extLst>
+              <a:ext uri="{FF2B5EF4-FFF2-40B4-BE49-F238E27FC236}">
+                <a16:creationId xmlns:a16="http://schemas.microsoft.com/office/drawing/2014/main" id="{AC59D4F1-9A48-F7BF-3736-C16506899640}"/>
+              </a:ext>
+            </a:extLst>
+          </p:cNvPr>
+          <p:cNvSpPr/>
+          <p:nvPr/>
+        </p:nvSpPr>
+        <p:spPr>
+          <a:xfrm>
+            <a:off x="7955280" y="109728"/>
+            <a:ext cx="1005840" cy="274320"/>
+          </a:xfrm>
+          <a:prstGeom prst="rect">
+            <a:avLst/>
+          </a:prstGeom>
+          <a:noFill/>
+          <a:ln/>
+        </p:spPr>
+        <p:txBody>
+          <a:bodyPr wrap="square" rtlCol="0" anchor="ctr"/>
+          <a:lstStyle/>
+          <a:p>
+            <a:pPr marL="0" indent="0" algn="ctr">
+              <a:buNone/>
+            </a:pPr>
+            <a:r>
+              <a:rPr lang="en-US" sz="1200" b="1" dirty="0">
+                <a:solidFill>
+                  <a:srgbClr val="FFFFFF"/>
+                </a:solidFill>
+                <a:latin typeface="맑은 고딕" pitchFamily="34" charset="0"/>
+                <a:ea typeface="맑은 고딕" pitchFamily="34" charset="-122"/>
+                <a:cs typeface="맑은 고딕" pitchFamily="34" charset="-120"/>
+              </a:rPr>
+              <a:t>3주차</a:t>
+            </a:r>
+            <a:endParaRPr lang="en-US" sz="1200" dirty="0"/>
+          </a:p>
+        </p:txBody>
+      </p:sp>
+      <p:sp>
+        <p:nvSpPr>
+          <p:cNvPr id="9" name="Shape 7">
+            <a:extLst>
+              <a:ext uri="{FF2B5EF4-FFF2-40B4-BE49-F238E27FC236}">
+                <a16:creationId xmlns:a16="http://schemas.microsoft.com/office/drawing/2014/main" id="{6F048545-5B75-E659-35E7-67592E18EE4B}"/>
+              </a:ext>
+            </a:extLst>
+          </p:cNvPr>
+          <p:cNvSpPr/>
+          <p:nvPr/>
+        </p:nvSpPr>
+        <p:spPr>
+          <a:xfrm>
+            <a:off x="484632" y="1033272"/>
+            <a:ext cx="1920240" cy="3474720"/>
+          </a:xfrm>
+          <a:prstGeom prst="roundRect">
+            <a:avLst>
+              <a:gd name="adj" fmla="val 5714"/>
+            </a:avLst>
+          </a:prstGeom>
+          <a:solidFill>
+            <a:srgbClr val="E2E8F0">
+              <a:alpha val="50000"/>
+            </a:srgbClr>
+          </a:solidFill>
+          <a:ln w="12700">
+            <a:solidFill>
+              <a:srgbClr val="E2E8F0"/>
+            </a:solidFill>
+            <a:prstDash val="solid"/>
+          </a:ln>
+        </p:spPr>
+        <p:txBody>
+          <a:bodyPr/>
+          <a:lstStyle/>
+          <a:p>
+            <a:endParaRPr lang="ko-KR" altLang="en-US"/>
+          </a:p>
+        </p:txBody>
+      </p:sp>
+      <p:sp>
+        <p:nvSpPr>
+          <p:cNvPr id="10" name="Shape 8">
+            <a:extLst>
+              <a:ext uri="{FF2B5EF4-FFF2-40B4-BE49-F238E27FC236}">
+                <a16:creationId xmlns:a16="http://schemas.microsoft.com/office/drawing/2014/main" id="{646AF64C-EB66-D499-E5B3-52CD2AC7D597}"/>
+              </a:ext>
+            </a:extLst>
+          </p:cNvPr>
+          <p:cNvSpPr/>
+          <p:nvPr/>
+        </p:nvSpPr>
+        <p:spPr>
+          <a:xfrm>
+            <a:off x="457200" y="1005840"/>
+            <a:ext cx="1920240" cy="3474720"/>
+          </a:xfrm>
+          <a:prstGeom prst="roundRect">
+            <a:avLst>
+              <a:gd name="adj" fmla="val 5714"/>
+            </a:avLst>
+          </a:prstGeom>
+          <a:solidFill>
+            <a:srgbClr val="FFFFFF"/>
+          </a:solidFill>
+          <a:ln w="12700">
+            <a:solidFill>
+              <a:srgbClr val="E2E8F0"/>
+            </a:solidFill>
+            <a:prstDash val="solid"/>
+          </a:ln>
+        </p:spPr>
+        <p:txBody>
+          <a:bodyPr/>
+          <a:lstStyle/>
+          <a:p>
+            <a:endParaRPr lang="ko-KR" altLang="en-US"/>
+          </a:p>
+        </p:txBody>
+      </p:sp>
+      <p:sp>
+        <p:nvSpPr>
+          <p:cNvPr id="11" name="Shape 9">
+            <a:extLst>
+              <a:ext uri="{FF2B5EF4-FFF2-40B4-BE49-F238E27FC236}">
+                <a16:creationId xmlns:a16="http://schemas.microsoft.com/office/drawing/2014/main" id="{5F15FC25-630D-2F74-28FC-973C8D5EFACE}"/>
+              </a:ext>
+            </a:extLst>
+          </p:cNvPr>
+          <p:cNvSpPr/>
+          <p:nvPr/>
+        </p:nvSpPr>
+        <p:spPr>
+          <a:xfrm>
+            <a:off x="1028700" y="1234440"/>
+            <a:ext cx="777240" cy="457200"/>
+          </a:xfrm>
+          <a:prstGeom prst="ellipse">
+            <a:avLst/>
+          </a:prstGeom>
+          <a:solidFill>
+            <a:srgbClr val="8B5CF6"/>
+          </a:solidFill>
+          <a:ln w="12700">
+            <a:solidFill>
+              <a:srgbClr val="8B5CF6"/>
+            </a:solidFill>
+            <a:prstDash val="solid"/>
+          </a:ln>
+        </p:spPr>
+        <p:txBody>
+          <a:bodyPr/>
+          <a:lstStyle/>
+          <a:p>
+            <a:endParaRPr lang="ko-KR" altLang="en-US"/>
+          </a:p>
+        </p:txBody>
+      </p:sp>
+      <p:sp>
+        <p:nvSpPr>
+          <p:cNvPr id="12" name="Text 10">
+            <a:extLst>
+              <a:ext uri="{FF2B5EF4-FFF2-40B4-BE49-F238E27FC236}">
+                <a16:creationId xmlns:a16="http://schemas.microsoft.com/office/drawing/2014/main" id="{7B3D902F-D345-7340-771A-E29283A6060B}"/>
+              </a:ext>
+            </a:extLst>
+          </p:cNvPr>
+          <p:cNvSpPr/>
+          <p:nvPr/>
+        </p:nvSpPr>
+        <p:spPr>
+          <a:xfrm>
+            <a:off x="1028700" y="1344168"/>
+            <a:ext cx="777240" cy="237744"/>
+          </a:xfrm>
+          <a:prstGeom prst="rect">
+            <a:avLst/>
+          </a:prstGeom>
+          <a:noFill/>
+          <a:ln/>
+        </p:spPr>
+        <p:txBody>
+          <a:bodyPr wrap="square" rtlCol="0" anchor="ctr"/>
+          <a:lstStyle/>
+          <a:p>
+            <a:pPr marL="0" indent="0" algn="ctr">
+              <a:buNone/>
+            </a:pPr>
+            <a:r>
+              <a:rPr lang="en-US" sz="1300" b="1" dirty="0">
+                <a:solidFill>
+                  <a:srgbClr val="FFFFFF"/>
+                </a:solidFill>
+                <a:latin typeface="맑은 고딕" pitchFamily="34" charset="0"/>
+                <a:ea typeface="맑은 고딕" pitchFamily="34" charset="-122"/>
+                <a:cs typeface="맑은 고딕" pitchFamily="34" charset="-120"/>
+              </a:rPr>
+              <a:t>Q1</a:t>
+            </a:r>
+            <a:endParaRPr lang="en-US" sz="1300" dirty="0"/>
+          </a:p>
+        </p:txBody>
+      </p:sp>
+      <p:sp>
+        <p:nvSpPr>
+          <p:cNvPr id="13" name="Text 11">
+            <a:extLst>
+              <a:ext uri="{FF2B5EF4-FFF2-40B4-BE49-F238E27FC236}">
+                <a16:creationId xmlns:a16="http://schemas.microsoft.com/office/drawing/2014/main" id="{86B91CFC-396A-2ACB-8717-47DD1F023C04}"/>
+              </a:ext>
+            </a:extLst>
+          </p:cNvPr>
+          <p:cNvSpPr/>
+          <p:nvPr/>
+        </p:nvSpPr>
+        <p:spPr>
+          <a:xfrm>
+            <a:off x="621792" y="1874520"/>
+            <a:ext cx="1591056" cy="1234440"/>
+          </a:xfrm>
+          <a:prstGeom prst="rect">
+            <a:avLst/>
+          </a:prstGeom>
+          <a:noFill/>
+          <a:ln/>
+        </p:spPr>
+        <p:txBody>
+          <a:bodyPr wrap="square" rtlCol="0" anchor="ctr"/>
+          <a:lstStyle/>
+          <a:p>
+            <a:pPr marL="0" indent="0" algn="ctr">
+              <a:lnSpc>
+                <a:spcPct val="130000"/>
+              </a:lnSpc>
+              <a:buNone/>
+            </a:pPr>
+            <a:r>
+              <a:rPr lang="en-US" sz="1400" dirty="0">
+                <a:solidFill>
+                  <a:srgbClr val="3B0764"/>
+                </a:solidFill>
+                <a:latin typeface="맑은 고딕" pitchFamily="34" charset="0"/>
+                <a:ea typeface="맑은 고딕" pitchFamily="34" charset="-122"/>
+                <a:cs typeface="맑은 고딕" pitchFamily="34" charset="-120"/>
+              </a:rPr>
+              <a:t>Q1. 드론이 공중에서 제자리에 멈추는 상태를 무엇이라 할까? </a:t>
+            </a:r>
+            <a:endParaRPr lang="en-US" sz="1400" dirty="0"/>
+          </a:p>
+        </p:txBody>
+      </p:sp>
+      <p:sp>
+        <p:nvSpPr>
+          <p:cNvPr id="14" name="Shape 12">
+            <a:extLst>
+              <a:ext uri="{FF2B5EF4-FFF2-40B4-BE49-F238E27FC236}">
+                <a16:creationId xmlns:a16="http://schemas.microsoft.com/office/drawing/2014/main" id="{81210A1B-8055-3B7B-52A0-0C9B1F52656E}"/>
+              </a:ext>
+            </a:extLst>
+          </p:cNvPr>
+          <p:cNvSpPr/>
+          <p:nvPr/>
+        </p:nvSpPr>
+        <p:spPr>
+          <a:xfrm>
+            <a:off x="594360" y="3291840"/>
+            <a:ext cx="1645920" cy="914400"/>
+          </a:xfrm>
+          <a:prstGeom prst="roundRect">
+            <a:avLst>
+              <a:gd name="adj" fmla="val 10000"/>
+            </a:avLst>
+          </a:prstGeom>
+          <a:solidFill>
+            <a:srgbClr val="F5F3FF"/>
+          </a:solidFill>
+          <a:ln w="12700">
+            <a:solidFill>
+              <a:srgbClr val="A78BFA"/>
+            </a:solidFill>
+            <a:prstDash val="solid"/>
+          </a:ln>
+        </p:spPr>
+        <p:txBody>
+          <a:bodyPr/>
+          <a:lstStyle/>
+          <a:p>
+            <a:endParaRPr lang="ko-KR" altLang="en-US"/>
+          </a:p>
+        </p:txBody>
+      </p:sp>
+      <p:sp>
+        <p:nvSpPr>
+          <p:cNvPr id="16" name="Text 14">
+            <a:extLst>
+              <a:ext uri="{FF2B5EF4-FFF2-40B4-BE49-F238E27FC236}">
+                <a16:creationId xmlns:a16="http://schemas.microsoft.com/office/drawing/2014/main" id="{56B8434E-B4E4-1676-D195-B912FF84880F}"/>
+              </a:ext>
+            </a:extLst>
+          </p:cNvPr>
+          <p:cNvSpPr/>
+          <p:nvPr/>
+        </p:nvSpPr>
+        <p:spPr>
+          <a:xfrm>
+            <a:off x="685800" y="3657600"/>
+            <a:ext cx="1463040" cy="438912"/>
+          </a:xfrm>
+          <a:prstGeom prst="rect">
+            <a:avLst/>
+          </a:prstGeom>
+          <a:noFill/>
+          <a:ln/>
+        </p:spPr>
+        <p:txBody>
+          <a:bodyPr wrap="square" rtlCol="0" anchor="ctr"/>
+          <a:lstStyle/>
+          <a:p>
+            <a:pPr marL="0" indent="0" algn="ctr">
+              <a:lnSpc>
+                <a:spcPct val="120000"/>
+              </a:lnSpc>
+              <a:buNone/>
+            </a:pPr>
+            <a:endParaRPr lang="en-US" sz="1100" dirty="0"/>
+          </a:p>
+        </p:txBody>
+      </p:sp>
+      <p:sp>
+        <p:nvSpPr>
+          <p:cNvPr id="17" name="Shape 15">
+            <a:extLst>
+              <a:ext uri="{FF2B5EF4-FFF2-40B4-BE49-F238E27FC236}">
+                <a16:creationId xmlns:a16="http://schemas.microsoft.com/office/drawing/2014/main" id="{5A95D4B3-2DDB-F20F-B979-88CC0B7A17E7}"/>
+              </a:ext>
+            </a:extLst>
+          </p:cNvPr>
+          <p:cNvSpPr/>
+          <p:nvPr/>
+        </p:nvSpPr>
+        <p:spPr>
+          <a:xfrm>
+            <a:off x="2587752" y="1033272"/>
+            <a:ext cx="1920240" cy="3474720"/>
+          </a:xfrm>
+          <a:prstGeom prst="roundRect">
+            <a:avLst>
+              <a:gd name="adj" fmla="val 5714"/>
+            </a:avLst>
+          </a:prstGeom>
+          <a:solidFill>
+            <a:srgbClr val="E2E8F0">
+              <a:alpha val="50000"/>
+            </a:srgbClr>
+          </a:solidFill>
+          <a:ln w="12700">
+            <a:solidFill>
+              <a:srgbClr val="E2E8F0"/>
+            </a:solidFill>
+            <a:prstDash val="solid"/>
+          </a:ln>
+        </p:spPr>
+        <p:txBody>
+          <a:bodyPr/>
+          <a:lstStyle/>
+          <a:p>
+            <a:endParaRPr lang="ko-KR" altLang="en-US"/>
+          </a:p>
+        </p:txBody>
+      </p:sp>
+      <p:sp>
+        <p:nvSpPr>
+          <p:cNvPr id="18" name="Shape 16">
+            <a:extLst>
+              <a:ext uri="{FF2B5EF4-FFF2-40B4-BE49-F238E27FC236}">
+                <a16:creationId xmlns:a16="http://schemas.microsoft.com/office/drawing/2014/main" id="{0CF7E550-4D4A-BA08-7898-6EF7C57A52EA}"/>
+              </a:ext>
+            </a:extLst>
+          </p:cNvPr>
+          <p:cNvSpPr/>
+          <p:nvPr/>
+        </p:nvSpPr>
+        <p:spPr>
+          <a:xfrm>
+            <a:off x="2560320" y="1005840"/>
+            <a:ext cx="1920240" cy="3474720"/>
+          </a:xfrm>
+          <a:prstGeom prst="roundRect">
+            <a:avLst>
+              <a:gd name="adj" fmla="val 5714"/>
+            </a:avLst>
+          </a:prstGeom>
+          <a:solidFill>
+            <a:srgbClr val="FFFFFF"/>
+          </a:solidFill>
+          <a:ln w="12700">
+            <a:solidFill>
+              <a:srgbClr val="E2E8F0"/>
+            </a:solidFill>
+            <a:prstDash val="solid"/>
+          </a:ln>
+        </p:spPr>
+        <p:txBody>
+          <a:bodyPr/>
+          <a:lstStyle/>
+          <a:p>
+            <a:endParaRPr lang="ko-KR" altLang="en-US"/>
+          </a:p>
+        </p:txBody>
+      </p:sp>
+      <p:sp>
+        <p:nvSpPr>
+          <p:cNvPr id="19" name="Shape 17">
+            <a:extLst>
+              <a:ext uri="{FF2B5EF4-FFF2-40B4-BE49-F238E27FC236}">
+                <a16:creationId xmlns:a16="http://schemas.microsoft.com/office/drawing/2014/main" id="{0A1135C3-507E-AF97-F4D8-AEAF34A9D530}"/>
+              </a:ext>
+            </a:extLst>
+          </p:cNvPr>
+          <p:cNvSpPr/>
+          <p:nvPr/>
+        </p:nvSpPr>
+        <p:spPr>
+          <a:xfrm>
+            <a:off x="3131820" y="1234440"/>
+            <a:ext cx="777240" cy="457200"/>
+          </a:xfrm>
+          <a:prstGeom prst="ellipse">
+            <a:avLst/>
+          </a:prstGeom>
+          <a:solidFill>
+            <a:srgbClr val="8B5CF6"/>
+          </a:solidFill>
+          <a:ln w="12700">
+            <a:solidFill>
+              <a:srgbClr val="8B5CF6"/>
+            </a:solidFill>
+            <a:prstDash val="solid"/>
+          </a:ln>
+        </p:spPr>
+        <p:txBody>
+          <a:bodyPr/>
+          <a:lstStyle/>
+          <a:p>
+            <a:endParaRPr lang="ko-KR" altLang="en-US"/>
+          </a:p>
+        </p:txBody>
+      </p:sp>
+      <p:sp>
+        <p:nvSpPr>
+          <p:cNvPr id="20" name="Text 18">
+            <a:extLst>
+              <a:ext uri="{FF2B5EF4-FFF2-40B4-BE49-F238E27FC236}">
+                <a16:creationId xmlns:a16="http://schemas.microsoft.com/office/drawing/2014/main" id="{A894DDA6-803F-6C88-4552-DC4506F50091}"/>
+              </a:ext>
+            </a:extLst>
+          </p:cNvPr>
+          <p:cNvSpPr/>
+          <p:nvPr/>
+        </p:nvSpPr>
+        <p:spPr>
+          <a:xfrm>
+            <a:off x="3131820" y="1344168"/>
+            <a:ext cx="777240" cy="237744"/>
+          </a:xfrm>
+          <a:prstGeom prst="rect">
+            <a:avLst/>
+          </a:prstGeom>
+          <a:noFill/>
+          <a:ln/>
+        </p:spPr>
+        <p:txBody>
+          <a:bodyPr wrap="square" rtlCol="0" anchor="ctr"/>
+          <a:lstStyle/>
+          <a:p>
+            <a:pPr marL="0" indent="0" algn="ctr">
+              <a:buNone/>
+            </a:pPr>
+            <a:r>
+              <a:rPr lang="en-US" sz="1300" b="1" dirty="0">
+                <a:solidFill>
+                  <a:srgbClr val="FFFFFF"/>
+                </a:solidFill>
+                <a:latin typeface="맑은 고딕" pitchFamily="34" charset="0"/>
+                <a:ea typeface="맑은 고딕" pitchFamily="34" charset="-122"/>
+                <a:cs typeface="맑은 고딕" pitchFamily="34" charset="-120"/>
+              </a:rPr>
+              <a:t>Q2</a:t>
+            </a:r>
+            <a:endParaRPr lang="en-US" sz="1300" dirty="0"/>
+          </a:p>
+        </p:txBody>
+      </p:sp>
+      <p:sp>
+        <p:nvSpPr>
+          <p:cNvPr id="21" name="Text 19">
+            <a:extLst>
+              <a:ext uri="{FF2B5EF4-FFF2-40B4-BE49-F238E27FC236}">
+                <a16:creationId xmlns:a16="http://schemas.microsoft.com/office/drawing/2014/main" id="{70A45710-5D5F-84AE-DC88-F7B59D21BBB9}"/>
+              </a:ext>
+            </a:extLst>
+          </p:cNvPr>
+          <p:cNvSpPr/>
+          <p:nvPr/>
+        </p:nvSpPr>
+        <p:spPr>
+          <a:xfrm>
+            <a:off x="2724912" y="1874520"/>
+            <a:ext cx="1591056" cy="1234440"/>
+          </a:xfrm>
+          <a:prstGeom prst="rect">
+            <a:avLst/>
+          </a:prstGeom>
+          <a:noFill/>
+          <a:ln/>
+        </p:spPr>
+        <p:txBody>
+          <a:bodyPr wrap="square" rtlCol="0" anchor="ctr"/>
+          <a:lstStyle/>
+          <a:p>
+            <a:pPr marL="0" indent="0" algn="ctr">
+              <a:lnSpc>
+                <a:spcPct val="130000"/>
+              </a:lnSpc>
+              <a:buNone/>
+            </a:pPr>
+            <a:r>
+              <a:rPr lang="en-US" sz="1400" dirty="0">
+                <a:solidFill>
+                  <a:srgbClr val="3B0764"/>
+                </a:solidFill>
+                <a:latin typeface="맑은 고딕" pitchFamily="34" charset="0"/>
+                <a:ea typeface="맑은 고딕" pitchFamily="34" charset="-122"/>
+                <a:cs typeface="맑은 고딕" pitchFamily="34" charset="-120"/>
+              </a:rPr>
+              <a:t>Q2. 드론을 위아래로 움직이는 조종은? </a:t>
+            </a:r>
+            <a:endParaRPr lang="en-US" sz="1400" dirty="0"/>
+          </a:p>
+        </p:txBody>
+      </p:sp>
+      <p:sp>
+        <p:nvSpPr>
+          <p:cNvPr id="22" name="Shape 20">
+            <a:extLst>
+              <a:ext uri="{FF2B5EF4-FFF2-40B4-BE49-F238E27FC236}">
+                <a16:creationId xmlns:a16="http://schemas.microsoft.com/office/drawing/2014/main" id="{86E50DC4-38CC-9C6F-6425-BDBA1D4F4477}"/>
+              </a:ext>
+            </a:extLst>
+          </p:cNvPr>
+          <p:cNvSpPr/>
+          <p:nvPr/>
+        </p:nvSpPr>
+        <p:spPr>
+          <a:xfrm>
+            <a:off x="2697480" y="3291840"/>
+            <a:ext cx="1645920" cy="914400"/>
+          </a:xfrm>
+          <a:prstGeom prst="roundRect">
+            <a:avLst>
+              <a:gd name="adj" fmla="val 10000"/>
+            </a:avLst>
+          </a:prstGeom>
+          <a:solidFill>
+            <a:srgbClr val="F5F3FF"/>
+          </a:solidFill>
+          <a:ln w="12700">
+            <a:solidFill>
+              <a:srgbClr val="A78BFA"/>
+            </a:solidFill>
+            <a:prstDash val="solid"/>
+          </a:ln>
+        </p:spPr>
+        <p:txBody>
+          <a:bodyPr/>
+          <a:lstStyle/>
+          <a:p>
+            <a:endParaRPr lang="ko-KR" altLang="en-US"/>
+          </a:p>
+        </p:txBody>
+      </p:sp>
+      <p:sp>
+        <p:nvSpPr>
+          <p:cNvPr id="24" name="Text 22">
+            <a:extLst>
+              <a:ext uri="{FF2B5EF4-FFF2-40B4-BE49-F238E27FC236}">
+                <a16:creationId xmlns:a16="http://schemas.microsoft.com/office/drawing/2014/main" id="{6C68AD42-1995-CC49-FDD4-4D522632E07F}"/>
+              </a:ext>
+            </a:extLst>
+          </p:cNvPr>
+          <p:cNvSpPr/>
+          <p:nvPr/>
+        </p:nvSpPr>
+        <p:spPr>
+          <a:xfrm>
+            <a:off x="2788920" y="3657600"/>
+            <a:ext cx="1463040" cy="438912"/>
+          </a:xfrm>
+          <a:prstGeom prst="rect">
+            <a:avLst/>
+          </a:prstGeom>
+          <a:noFill/>
+          <a:ln/>
+        </p:spPr>
+        <p:txBody>
+          <a:bodyPr wrap="square" rtlCol="0" anchor="ctr"/>
+          <a:lstStyle/>
+          <a:p>
+            <a:pPr marL="0" indent="0" algn="ctr">
+              <a:lnSpc>
+                <a:spcPct val="120000"/>
+              </a:lnSpc>
+              <a:buNone/>
+            </a:pPr>
+            <a:endParaRPr lang="en-US" sz="1100" dirty="0"/>
+          </a:p>
+        </p:txBody>
+      </p:sp>
+      <p:sp>
+        <p:nvSpPr>
+          <p:cNvPr id="25" name="Shape 23">
+            <a:extLst>
+              <a:ext uri="{FF2B5EF4-FFF2-40B4-BE49-F238E27FC236}">
+                <a16:creationId xmlns:a16="http://schemas.microsoft.com/office/drawing/2014/main" id="{11724AD8-337B-157F-9AF1-2E6B451A4C8C}"/>
+              </a:ext>
+            </a:extLst>
+          </p:cNvPr>
+          <p:cNvSpPr/>
+          <p:nvPr/>
+        </p:nvSpPr>
+        <p:spPr>
+          <a:xfrm>
+            <a:off x="4690872" y="1033272"/>
+            <a:ext cx="1920240" cy="3474720"/>
+          </a:xfrm>
+          <a:prstGeom prst="roundRect">
+            <a:avLst>
+              <a:gd name="adj" fmla="val 5714"/>
+            </a:avLst>
+          </a:prstGeom>
+          <a:solidFill>
+            <a:srgbClr val="E2E8F0">
+              <a:alpha val="50000"/>
+            </a:srgbClr>
+          </a:solidFill>
+          <a:ln w="12700">
+            <a:solidFill>
+              <a:srgbClr val="E2E8F0"/>
+            </a:solidFill>
+            <a:prstDash val="solid"/>
+          </a:ln>
+        </p:spPr>
+        <p:txBody>
+          <a:bodyPr/>
+          <a:lstStyle/>
+          <a:p>
+            <a:endParaRPr lang="ko-KR" altLang="en-US"/>
+          </a:p>
+        </p:txBody>
+      </p:sp>
+      <p:sp>
+        <p:nvSpPr>
+          <p:cNvPr id="26" name="Shape 24">
+            <a:extLst>
+              <a:ext uri="{FF2B5EF4-FFF2-40B4-BE49-F238E27FC236}">
+                <a16:creationId xmlns:a16="http://schemas.microsoft.com/office/drawing/2014/main" id="{AE9D5D04-C4BF-BD8C-B005-04C235A541EE}"/>
+              </a:ext>
+            </a:extLst>
+          </p:cNvPr>
+          <p:cNvSpPr/>
+          <p:nvPr/>
+        </p:nvSpPr>
+        <p:spPr>
+          <a:xfrm>
+            <a:off x="4663440" y="1005840"/>
+            <a:ext cx="1920240" cy="3474720"/>
+          </a:xfrm>
+          <a:prstGeom prst="roundRect">
+            <a:avLst>
+              <a:gd name="adj" fmla="val 5714"/>
+            </a:avLst>
+          </a:prstGeom>
+          <a:solidFill>
+            <a:srgbClr val="FFFFFF"/>
+          </a:solidFill>
+          <a:ln w="12700">
+            <a:solidFill>
+              <a:srgbClr val="E2E8F0"/>
+            </a:solidFill>
+            <a:prstDash val="solid"/>
+          </a:ln>
+        </p:spPr>
+        <p:txBody>
+          <a:bodyPr/>
+          <a:lstStyle/>
+          <a:p>
+            <a:endParaRPr lang="ko-KR" altLang="en-US"/>
+          </a:p>
+        </p:txBody>
+      </p:sp>
+      <p:sp>
+        <p:nvSpPr>
+          <p:cNvPr id="27" name="Shape 25">
+            <a:extLst>
+              <a:ext uri="{FF2B5EF4-FFF2-40B4-BE49-F238E27FC236}">
+                <a16:creationId xmlns:a16="http://schemas.microsoft.com/office/drawing/2014/main" id="{D5D1B63B-4CF9-D0BA-E7B1-FE6BC4001FCB}"/>
+              </a:ext>
+            </a:extLst>
+          </p:cNvPr>
+          <p:cNvSpPr/>
+          <p:nvPr/>
+        </p:nvSpPr>
+        <p:spPr>
+          <a:xfrm>
+            <a:off x="5234940" y="1234440"/>
+            <a:ext cx="777240" cy="457200"/>
+          </a:xfrm>
+          <a:prstGeom prst="ellipse">
+            <a:avLst/>
+          </a:prstGeom>
+          <a:solidFill>
+            <a:srgbClr val="8B5CF6"/>
+          </a:solidFill>
+          <a:ln w="12700">
+            <a:solidFill>
+              <a:srgbClr val="8B5CF6"/>
+            </a:solidFill>
+            <a:prstDash val="solid"/>
+          </a:ln>
+        </p:spPr>
+        <p:txBody>
+          <a:bodyPr/>
+          <a:lstStyle/>
+          <a:p>
+            <a:endParaRPr lang="ko-KR" altLang="en-US"/>
+          </a:p>
+        </p:txBody>
+      </p:sp>
+      <p:sp>
+        <p:nvSpPr>
+          <p:cNvPr id="28" name="Text 26">
+            <a:extLst>
+              <a:ext uri="{FF2B5EF4-FFF2-40B4-BE49-F238E27FC236}">
+                <a16:creationId xmlns:a16="http://schemas.microsoft.com/office/drawing/2014/main" id="{3E091B76-6EF1-46F2-3EC3-58B462BF2D24}"/>
+              </a:ext>
+            </a:extLst>
+          </p:cNvPr>
+          <p:cNvSpPr/>
+          <p:nvPr/>
+        </p:nvSpPr>
+        <p:spPr>
+          <a:xfrm>
+            <a:off x="5234940" y="1344168"/>
+            <a:ext cx="777240" cy="237744"/>
+          </a:xfrm>
+          <a:prstGeom prst="rect">
+            <a:avLst/>
+          </a:prstGeom>
+          <a:noFill/>
+          <a:ln/>
+        </p:spPr>
+        <p:txBody>
+          <a:bodyPr wrap="square" rtlCol="0" anchor="ctr"/>
+          <a:lstStyle/>
+          <a:p>
+            <a:pPr marL="0" indent="0" algn="ctr">
+              <a:buNone/>
+            </a:pPr>
+            <a:r>
+              <a:rPr lang="en-US" sz="1300" b="1" dirty="0">
+                <a:solidFill>
+                  <a:srgbClr val="FFFFFF"/>
+                </a:solidFill>
+                <a:latin typeface="맑은 고딕" pitchFamily="34" charset="0"/>
+                <a:ea typeface="맑은 고딕" pitchFamily="34" charset="-122"/>
+                <a:cs typeface="맑은 고딕" pitchFamily="34" charset="-120"/>
+              </a:rPr>
+              <a:t>Q3</a:t>
+            </a:r>
+            <a:endParaRPr lang="en-US" sz="1300" dirty="0"/>
+          </a:p>
+        </p:txBody>
+      </p:sp>
+      <p:sp>
+        <p:nvSpPr>
+          <p:cNvPr id="29" name="Text 27">
+            <a:extLst>
+              <a:ext uri="{FF2B5EF4-FFF2-40B4-BE49-F238E27FC236}">
+                <a16:creationId xmlns:a16="http://schemas.microsoft.com/office/drawing/2014/main" id="{62434C37-D344-ADD9-3561-27420A463D4E}"/>
+              </a:ext>
+            </a:extLst>
+          </p:cNvPr>
+          <p:cNvSpPr/>
+          <p:nvPr/>
+        </p:nvSpPr>
+        <p:spPr>
+          <a:xfrm>
+            <a:off x="4828032" y="1874520"/>
+            <a:ext cx="1591056" cy="1234440"/>
+          </a:xfrm>
+          <a:prstGeom prst="rect">
+            <a:avLst/>
+          </a:prstGeom>
+          <a:noFill/>
+          <a:ln/>
+        </p:spPr>
+        <p:txBody>
+          <a:bodyPr wrap="square" rtlCol="0" anchor="ctr"/>
+          <a:lstStyle/>
+          <a:p>
+            <a:pPr marL="0" indent="0" algn="ctr">
+              <a:lnSpc>
+                <a:spcPct val="130000"/>
+              </a:lnSpc>
+              <a:buNone/>
+            </a:pPr>
+            <a:r>
+              <a:rPr lang="en-US" sz="1400" dirty="0">
+                <a:solidFill>
+                  <a:srgbClr val="3B0764"/>
+                </a:solidFill>
+                <a:latin typeface="맑은 고딕" pitchFamily="34" charset="0"/>
+                <a:ea typeface="맑은 고딕" pitchFamily="34" charset="-122"/>
+                <a:cs typeface="맑은 고딕" pitchFamily="34" charset="-120"/>
+              </a:rPr>
+              <a:t>Q3. 드론이 좌우로 기울어지는 움직임은? </a:t>
+            </a:r>
+            <a:endParaRPr lang="en-US" sz="1400" dirty="0"/>
+          </a:p>
+        </p:txBody>
+      </p:sp>
+      <p:sp>
+        <p:nvSpPr>
+          <p:cNvPr id="30" name="Shape 28">
+            <a:extLst>
+              <a:ext uri="{FF2B5EF4-FFF2-40B4-BE49-F238E27FC236}">
+                <a16:creationId xmlns:a16="http://schemas.microsoft.com/office/drawing/2014/main" id="{C10C2F49-3EE6-F25D-EDB5-0F541FA8FBC5}"/>
+              </a:ext>
+            </a:extLst>
+          </p:cNvPr>
+          <p:cNvSpPr/>
+          <p:nvPr/>
+        </p:nvSpPr>
+        <p:spPr>
+          <a:xfrm>
+            <a:off x="4800600" y="3291840"/>
+            <a:ext cx="1645920" cy="914400"/>
+          </a:xfrm>
+          <a:prstGeom prst="roundRect">
+            <a:avLst>
+              <a:gd name="adj" fmla="val 10000"/>
+            </a:avLst>
+          </a:prstGeom>
+          <a:solidFill>
+            <a:srgbClr val="F5F3FF"/>
+          </a:solidFill>
+          <a:ln w="12700">
+            <a:solidFill>
+              <a:srgbClr val="A78BFA"/>
+            </a:solidFill>
+            <a:prstDash val="solid"/>
+          </a:ln>
+        </p:spPr>
+        <p:txBody>
+          <a:bodyPr/>
+          <a:lstStyle/>
+          <a:p>
+            <a:endParaRPr lang="ko-KR" altLang="en-US"/>
+          </a:p>
+        </p:txBody>
+      </p:sp>
+      <p:sp>
+        <p:nvSpPr>
+          <p:cNvPr id="32" name="Text 30">
+            <a:extLst>
+              <a:ext uri="{FF2B5EF4-FFF2-40B4-BE49-F238E27FC236}">
+                <a16:creationId xmlns:a16="http://schemas.microsoft.com/office/drawing/2014/main" id="{D0786000-D299-D5E5-571E-BA119A285386}"/>
+              </a:ext>
+            </a:extLst>
+          </p:cNvPr>
+          <p:cNvSpPr/>
+          <p:nvPr/>
+        </p:nvSpPr>
+        <p:spPr>
+          <a:xfrm>
+            <a:off x="4892040" y="3657600"/>
+            <a:ext cx="1463040" cy="438912"/>
+          </a:xfrm>
+          <a:prstGeom prst="rect">
+            <a:avLst/>
+          </a:prstGeom>
+          <a:noFill/>
+          <a:ln/>
+        </p:spPr>
+        <p:txBody>
+          <a:bodyPr wrap="square" rtlCol="0" anchor="ctr"/>
+          <a:lstStyle/>
+          <a:p>
+            <a:pPr marL="0" indent="0" algn="ctr">
+              <a:lnSpc>
+                <a:spcPct val="120000"/>
+              </a:lnSpc>
+              <a:buNone/>
+            </a:pPr>
+            <a:endParaRPr lang="en-US" sz="1100" dirty="0"/>
+          </a:p>
+        </p:txBody>
+      </p:sp>
+      <p:sp>
+        <p:nvSpPr>
+          <p:cNvPr id="33" name="Shape 31">
+            <a:extLst>
+              <a:ext uri="{FF2B5EF4-FFF2-40B4-BE49-F238E27FC236}">
+                <a16:creationId xmlns:a16="http://schemas.microsoft.com/office/drawing/2014/main" id="{3D084A90-B46A-0A5E-222F-6C193A98D580}"/>
+              </a:ext>
+            </a:extLst>
+          </p:cNvPr>
+          <p:cNvSpPr/>
+          <p:nvPr/>
+        </p:nvSpPr>
+        <p:spPr>
+          <a:xfrm>
+            <a:off x="6793992" y="1033272"/>
+            <a:ext cx="1920240" cy="3474720"/>
+          </a:xfrm>
+          <a:prstGeom prst="roundRect">
+            <a:avLst>
+              <a:gd name="adj" fmla="val 5714"/>
+            </a:avLst>
+          </a:prstGeom>
+          <a:solidFill>
+            <a:srgbClr val="E2E8F0">
+              <a:alpha val="50000"/>
+            </a:srgbClr>
+          </a:solidFill>
+          <a:ln w="12700">
+            <a:solidFill>
+              <a:srgbClr val="E2E8F0"/>
+            </a:solidFill>
+            <a:prstDash val="solid"/>
+          </a:ln>
+        </p:spPr>
+        <p:txBody>
+          <a:bodyPr/>
+          <a:lstStyle/>
+          <a:p>
+            <a:endParaRPr lang="ko-KR" altLang="en-US"/>
+          </a:p>
+        </p:txBody>
+      </p:sp>
+      <p:sp>
+        <p:nvSpPr>
+          <p:cNvPr id="34" name="Shape 32">
+            <a:extLst>
+              <a:ext uri="{FF2B5EF4-FFF2-40B4-BE49-F238E27FC236}">
+                <a16:creationId xmlns:a16="http://schemas.microsoft.com/office/drawing/2014/main" id="{E456C95B-5A56-1D0E-354D-61109183BD71}"/>
+              </a:ext>
+            </a:extLst>
+          </p:cNvPr>
+          <p:cNvSpPr/>
+          <p:nvPr/>
+        </p:nvSpPr>
+        <p:spPr>
+          <a:xfrm>
+            <a:off x="6766560" y="1005840"/>
+            <a:ext cx="1920240" cy="3474720"/>
+          </a:xfrm>
+          <a:prstGeom prst="roundRect">
+            <a:avLst>
+              <a:gd name="adj" fmla="val 5714"/>
+            </a:avLst>
+          </a:prstGeom>
+          <a:solidFill>
+            <a:srgbClr val="FFFFFF"/>
+          </a:solidFill>
+          <a:ln w="12700">
+            <a:solidFill>
+              <a:srgbClr val="E2E8F0"/>
+            </a:solidFill>
+            <a:prstDash val="solid"/>
+          </a:ln>
+        </p:spPr>
+        <p:txBody>
+          <a:bodyPr/>
+          <a:lstStyle/>
+          <a:p>
+            <a:endParaRPr lang="ko-KR" altLang="en-US"/>
+          </a:p>
+        </p:txBody>
+      </p:sp>
+      <p:sp>
+        <p:nvSpPr>
+          <p:cNvPr id="35" name="Shape 33">
+            <a:extLst>
+              <a:ext uri="{FF2B5EF4-FFF2-40B4-BE49-F238E27FC236}">
+                <a16:creationId xmlns:a16="http://schemas.microsoft.com/office/drawing/2014/main" id="{A994AAF5-E8D6-C72A-28DA-3F0D76A6C10D}"/>
+              </a:ext>
+            </a:extLst>
+          </p:cNvPr>
+          <p:cNvSpPr/>
+          <p:nvPr/>
+        </p:nvSpPr>
+        <p:spPr>
+          <a:xfrm>
+            <a:off x="7338060" y="1234440"/>
+            <a:ext cx="777240" cy="457200"/>
+          </a:xfrm>
+          <a:prstGeom prst="ellipse">
+            <a:avLst/>
+          </a:prstGeom>
+          <a:solidFill>
+            <a:srgbClr val="8B5CF6"/>
+          </a:solidFill>
+          <a:ln w="12700">
+            <a:solidFill>
+              <a:srgbClr val="8B5CF6"/>
+            </a:solidFill>
+            <a:prstDash val="solid"/>
+          </a:ln>
+        </p:spPr>
+        <p:txBody>
+          <a:bodyPr/>
+          <a:lstStyle/>
+          <a:p>
+            <a:endParaRPr lang="ko-KR" altLang="en-US"/>
+          </a:p>
+        </p:txBody>
+      </p:sp>
+      <p:sp>
+        <p:nvSpPr>
+          <p:cNvPr id="36" name="Text 34">
+            <a:extLst>
+              <a:ext uri="{FF2B5EF4-FFF2-40B4-BE49-F238E27FC236}">
+                <a16:creationId xmlns:a16="http://schemas.microsoft.com/office/drawing/2014/main" id="{06881CDD-F972-CA4B-BDC2-DD527697F2F4}"/>
+              </a:ext>
+            </a:extLst>
+          </p:cNvPr>
+          <p:cNvSpPr/>
+          <p:nvPr/>
+        </p:nvSpPr>
+        <p:spPr>
+          <a:xfrm>
+            <a:off x="7338060" y="1344168"/>
+            <a:ext cx="777240" cy="237744"/>
+          </a:xfrm>
+          <a:prstGeom prst="rect">
+            <a:avLst/>
+          </a:prstGeom>
+          <a:noFill/>
+          <a:ln/>
+        </p:spPr>
+        <p:txBody>
+          <a:bodyPr wrap="square" rtlCol="0" anchor="ctr"/>
+          <a:lstStyle/>
+          <a:p>
+            <a:pPr marL="0" indent="0" algn="ctr">
+              <a:buNone/>
+            </a:pPr>
+            <a:r>
+              <a:rPr lang="en-US" sz="1300" b="1" dirty="0">
+                <a:solidFill>
+                  <a:srgbClr val="FFFFFF"/>
+                </a:solidFill>
+                <a:latin typeface="맑은 고딕" pitchFamily="34" charset="0"/>
+                <a:ea typeface="맑은 고딕" pitchFamily="34" charset="-122"/>
+                <a:cs typeface="맑은 고딕" pitchFamily="34" charset="-120"/>
+              </a:rPr>
+              <a:t>Q4</a:t>
+            </a:r>
+            <a:endParaRPr lang="en-US" sz="1300" dirty="0"/>
+          </a:p>
+        </p:txBody>
+      </p:sp>
+      <p:sp>
+        <p:nvSpPr>
+          <p:cNvPr id="37" name="Text 35">
+            <a:extLst>
+              <a:ext uri="{FF2B5EF4-FFF2-40B4-BE49-F238E27FC236}">
+                <a16:creationId xmlns:a16="http://schemas.microsoft.com/office/drawing/2014/main" id="{03CBA4DB-D961-CC2F-67FD-92E301DAF0F4}"/>
+              </a:ext>
+            </a:extLst>
+          </p:cNvPr>
+          <p:cNvSpPr/>
+          <p:nvPr/>
+        </p:nvSpPr>
+        <p:spPr>
+          <a:xfrm>
+            <a:off x="6931152" y="1874520"/>
+            <a:ext cx="1591056" cy="1234440"/>
+          </a:xfrm>
+          <a:prstGeom prst="rect">
+            <a:avLst/>
+          </a:prstGeom>
+          <a:noFill/>
+          <a:ln/>
+        </p:spPr>
+        <p:txBody>
+          <a:bodyPr wrap="square" rtlCol="0" anchor="ctr"/>
+          <a:lstStyle/>
+          <a:p>
+            <a:pPr marL="0" indent="0" algn="ctr">
+              <a:lnSpc>
+                <a:spcPct val="130000"/>
+              </a:lnSpc>
+              <a:buNone/>
+            </a:pPr>
+            <a:r>
+              <a:rPr lang="en-US" sz="1400" dirty="0">
+                <a:solidFill>
+                  <a:srgbClr val="3B0764"/>
+                </a:solidFill>
+                <a:latin typeface="맑은 고딕" pitchFamily="34" charset="0"/>
+                <a:ea typeface="맑은 고딕" pitchFamily="34" charset="-122"/>
+                <a:cs typeface="맑은 고딕" pitchFamily="34" charset="-120"/>
+              </a:rPr>
+              <a:t>Q4. 드론이 제자리에서 방향을 바꾸는 움직임은? (요)</a:t>
+            </a:r>
+            <a:endParaRPr lang="en-US" sz="1400" dirty="0"/>
+          </a:p>
+        </p:txBody>
+      </p:sp>
+      <p:sp>
+        <p:nvSpPr>
+          <p:cNvPr id="38" name="Shape 36">
+            <a:extLst>
+              <a:ext uri="{FF2B5EF4-FFF2-40B4-BE49-F238E27FC236}">
+                <a16:creationId xmlns:a16="http://schemas.microsoft.com/office/drawing/2014/main" id="{629AF6F8-63F4-8238-B6CB-D3918DF4CD66}"/>
+              </a:ext>
+            </a:extLst>
+          </p:cNvPr>
+          <p:cNvSpPr/>
+          <p:nvPr/>
+        </p:nvSpPr>
+        <p:spPr>
+          <a:xfrm>
+            <a:off x="6903720" y="3291840"/>
+            <a:ext cx="1645920" cy="914400"/>
+          </a:xfrm>
+          <a:prstGeom prst="roundRect">
+            <a:avLst>
+              <a:gd name="adj" fmla="val 10000"/>
+            </a:avLst>
+          </a:prstGeom>
+          <a:solidFill>
+            <a:srgbClr val="F5F3FF"/>
+          </a:solidFill>
+          <a:ln w="12700">
+            <a:solidFill>
+              <a:srgbClr val="A78BFA"/>
+            </a:solidFill>
+            <a:prstDash val="solid"/>
+          </a:ln>
+        </p:spPr>
+        <p:txBody>
+          <a:bodyPr/>
+          <a:lstStyle/>
+          <a:p>
+            <a:endParaRPr lang="ko-KR" altLang="en-US"/>
+          </a:p>
+        </p:txBody>
+      </p:sp>
+      <p:sp>
+        <p:nvSpPr>
+          <p:cNvPr id="40" name="Text 38">
+            <a:extLst>
+              <a:ext uri="{FF2B5EF4-FFF2-40B4-BE49-F238E27FC236}">
+                <a16:creationId xmlns:a16="http://schemas.microsoft.com/office/drawing/2014/main" id="{EA6AD924-3B47-3946-1CCE-20138CEAB917}"/>
+              </a:ext>
+            </a:extLst>
+          </p:cNvPr>
+          <p:cNvSpPr/>
+          <p:nvPr/>
+        </p:nvSpPr>
+        <p:spPr>
+          <a:xfrm>
+            <a:off x="6995160" y="3657600"/>
+            <a:ext cx="1463040" cy="438912"/>
+          </a:xfrm>
+          <a:prstGeom prst="rect">
+            <a:avLst/>
+          </a:prstGeom>
+          <a:noFill/>
+          <a:ln/>
+        </p:spPr>
+        <p:txBody>
+          <a:bodyPr wrap="square" rtlCol="0" anchor="ctr"/>
+          <a:lstStyle/>
+          <a:p>
+            <a:pPr marL="0" indent="0" algn="ctr">
+              <a:lnSpc>
+                <a:spcPct val="120000"/>
+              </a:lnSpc>
+              <a:buNone/>
+            </a:pPr>
+            <a:endParaRPr lang="en-US" sz="1100" dirty="0"/>
+          </a:p>
+        </p:txBody>
+      </p:sp>
+      <p:sp>
+        <p:nvSpPr>
+          <p:cNvPr id="42" name="Text 39">
+            <a:extLst>
+              <a:ext uri="{FF2B5EF4-FFF2-40B4-BE49-F238E27FC236}">
+                <a16:creationId xmlns:a16="http://schemas.microsoft.com/office/drawing/2014/main" id="{8D662130-A569-FF82-B199-CBC8D7B713A2}"/>
+              </a:ext>
+            </a:extLst>
+          </p:cNvPr>
+          <p:cNvSpPr/>
+          <p:nvPr/>
+        </p:nvSpPr>
+        <p:spPr>
+          <a:xfrm>
+            <a:off x="274320" y="4800600"/>
+            <a:ext cx="2286000" cy="274320"/>
+          </a:xfrm>
+          <a:prstGeom prst="rect">
+            <a:avLst/>
+          </a:prstGeom>
+          <a:noFill/>
+          <a:ln/>
+        </p:spPr>
+        <p:txBody>
+          <a:bodyPr wrap="square" rtlCol="0" anchor="b"/>
+          <a:lstStyle/>
+          <a:p>
+            <a:pPr marL="0" indent="0" algn="l">
+              <a:buNone/>
+            </a:pPr>
+            <a:r>
+              <a:rPr lang="en-US" sz="900" dirty="0">
+                <a:solidFill>
+                  <a:srgbClr val="A0AEC0"/>
+                </a:solidFill>
+                <a:latin typeface="맑은 고딕" pitchFamily="34" charset="0"/>
+                <a:ea typeface="맑은 고딕" pitchFamily="34" charset="-122"/>
+                <a:cs typeface="맑은 고딕" pitchFamily="34" charset="-120"/>
+              </a:rPr>
+              <a:t>드론 코딩 교실</a:t>
+            </a:r>
+            <a:endParaRPr lang="en-US" sz="900" dirty="0"/>
+          </a:p>
+        </p:txBody>
+      </p:sp>
+      <p:sp>
+        <p:nvSpPr>
+          <p:cNvPr id="43" name="Text 40">
+            <a:extLst>
+              <a:ext uri="{FF2B5EF4-FFF2-40B4-BE49-F238E27FC236}">
+                <a16:creationId xmlns:a16="http://schemas.microsoft.com/office/drawing/2014/main" id="{AB69E53D-A9BF-AC06-B02C-734E9DB8F1F3}"/>
+              </a:ext>
+            </a:extLst>
+          </p:cNvPr>
+          <p:cNvSpPr/>
+          <p:nvPr/>
+        </p:nvSpPr>
+        <p:spPr>
+          <a:xfrm>
+            <a:off x="6858000" y="4800600"/>
+            <a:ext cx="2011680" cy="274320"/>
+          </a:xfrm>
+          <a:prstGeom prst="rect">
+            <a:avLst/>
+          </a:prstGeom>
+          <a:noFill/>
+          <a:ln/>
+        </p:spPr>
+        <p:txBody>
+          <a:bodyPr wrap="square" rtlCol="0" anchor="b"/>
+          <a:lstStyle/>
+          <a:p>
+            <a:pPr marL="0" indent="0" algn="r">
+              <a:buNone/>
+            </a:pPr>
+            <a:r>
+              <a:rPr lang="en-US" sz="900" dirty="0">
+                <a:solidFill>
+                  <a:srgbClr val="A0AEC0"/>
+                </a:solidFill>
+                <a:latin typeface="맑은 고딕" pitchFamily="34" charset="0"/>
+                <a:ea typeface="맑은 고딕" pitchFamily="34" charset="-122"/>
+                <a:cs typeface="맑은 고딕" pitchFamily="34" charset="-120"/>
+              </a:rPr>
+              <a:t>12 / 17</a:t>
+            </a:r>
+            <a:endParaRPr lang="en-US" sz="900" dirty="0"/>
+          </a:p>
+        </p:txBody>
+      </p:sp>
+    </p:spTree>
+    <p:extLst>
+      <p:ext uri="{BB962C8B-B14F-4D97-AF65-F5344CB8AC3E}">
+        <p14:creationId xmlns:p14="http://schemas.microsoft.com/office/powerpoint/2010/main" val="1455325911"/>
+      </p:ext>
+    </p:extLst>
   </p:cSld>
   <p:clrMapOvr>
     <a:masterClrMapping/>
@@ -12153,6 +12266,802 @@
 </p:sld>
 </file>
 
+<file path=ppt/slides/slide20.xml><?xml version="1.0" encoding="utf-8"?>
+<p:sld xmlns:a="http://schemas.openxmlformats.org/drawingml/2006/main" xmlns:r="http://schemas.openxmlformats.org/officeDocument/2006/relationships" xmlns:p="http://schemas.openxmlformats.org/presentationml/2006/main">
+  <p:cSld>
+    <p:spTree>
+      <p:nvGrpSpPr>
+        <p:cNvPr id="1" name="">
+          <a:extLst>
+            <a:ext uri="{FF2B5EF4-FFF2-40B4-BE49-F238E27FC236}">
+              <a16:creationId xmlns:a16="http://schemas.microsoft.com/office/drawing/2014/main" id="{49C0E67B-0BCB-7390-D0BC-FA29D68D602A}"/>
+            </a:ext>
+          </a:extLst>
+        </p:cNvPr>
+        <p:cNvGrpSpPr/>
+        <p:nvPr/>
+      </p:nvGrpSpPr>
+      <p:grpSpPr>
+        <a:xfrm>
+          <a:off x="0" y="0"/>
+          <a:ext cx="0" cy="0"/>
+          <a:chOff x="0" y="0"/>
+          <a:chExt cx="0" cy="0"/>
+        </a:xfrm>
+      </p:grpSpPr>
+      <p:sp>
+        <p:nvSpPr>
+          <p:cNvPr id="2" name="Shape 0">
+            <a:extLst>
+              <a:ext uri="{FF2B5EF4-FFF2-40B4-BE49-F238E27FC236}">
+                <a16:creationId xmlns:a16="http://schemas.microsoft.com/office/drawing/2014/main" id="{C9F824DE-3B4D-C330-42AB-8EBF84017363}"/>
+              </a:ext>
+            </a:extLst>
+          </p:cNvPr>
+          <p:cNvSpPr/>
+          <p:nvPr/>
+        </p:nvSpPr>
+        <p:spPr>
+          <a:xfrm>
+            <a:off x="0" y="0"/>
+            <a:ext cx="9144000" cy="658368"/>
+          </a:xfrm>
+          <a:prstGeom prst="rect">
+            <a:avLst/>
+          </a:prstGeom>
+          <a:solidFill>
+            <a:srgbClr val="6D28D9"/>
+          </a:solidFill>
+          <a:ln w="12700">
+            <a:solidFill>
+              <a:srgbClr val="6D28D9"/>
+            </a:solidFill>
+            <a:prstDash val="solid"/>
+          </a:ln>
+        </p:spPr>
+        <p:txBody>
+          <a:bodyPr/>
+          <a:lstStyle/>
+          <a:p>
+            <a:endParaRPr lang="ko-KR" altLang="en-US"/>
+          </a:p>
+        </p:txBody>
+      </p:sp>
+      <p:sp>
+        <p:nvSpPr>
+          <p:cNvPr id="3" name="Shape 1">
+            <a:extLst>
+              <a:ext uri="{FF2B5EF4-FFF2-40B4-BE49-F238E27FC236}">
+                <a16:creationId xmlns:a16="http://schemas.microsoft.com/office/drawing/2014/main" id="{7A086553-921D-2354-AA1D-C83D4C642ABB}"/>
+              </a:ext>
+            </a:extLst>
+          </p:cNvPr>
+          <p:cNvSpPr/>
+          <p:nvPr/>
+        </p:nvSpPr>
+        <p:spPr>
+          <a:xfrm>
+            <a:off x="0" y="0"/>
+            <a:ext cx="5486400" cy="658368"/>
+          </a:xfrm>
+          <a:prstGeom prst="rect">
+            <a:avLst/>
+          </a:prstGeom>
+          <a:solidFill>
+            <a:srgbClr val="8B5CF6"/>
+          </a:solidFill>
+          <a:ln w="12700">
+            <a:solidFill>
+              <a:srgbClr val="8B5CF6"/>
+            </a:solidFill>
+            <a:prstDash val="solid"/>
+          </a:ln>
+        </p:spPr>
+        <p:txBody>
+          <a:bodyPr/>
+          <a:lstStyle/>
+          <a:p>
+            <a:endParaRPr lang="ko-KR" altLang="en-US"/>
+          </a:p>
+        </p:txBody>
+      </p:sp>
+      <p:sp>
+        <p:nvSpPr>
+          <p:cNvPr id="4" name="Shape 2">
+            <a:extLst>
+              <a:ext uri="{FF2B5EF4-FFF2-40B4-BE49-F238E27FC236}">
+                <a16:creationId xmlns:a16="http://schemas.microsoft.com/office/drawing/2014/main" id="{3324050F-977D-40BF-423C-A3040A802CC8}"/>
+              </a:ext>
+            </a:extLst>
+          </p:cNvPr>
+          <p:cNvSpPr/>
+          <p:nvPr/>
+        </p:nvSpPr>
+        <p:spPr>
+          <a:xfrm>
+            <a:off x="3657600" y="0"/>
+            <a:ext cx="3657600" cy="658368"/>
+          </a:xfrm>
+          <a:prstGeom prst="rect">
+            <a:avLst/>
+          </a:prstGeom>
+          <a:solidFill>
+            <a:srgbClr val="8B5CF6">
+              <a:alpha val="50000"/>
+            </a:srgbClr>
+          </a:solidFill>
+          <a:ln w="12700">
+            <a:solidFill>
+              <a:srgbClr val="8B5CF6"/>
+            </a:solidFill>
+            <a:prstDash val="solid"/>
+          </a:ln>
+        </p:spPr>
+        <p:txBody>
+          <a:bodyPr/>
+          <a:lstStyle/>
+          <a:p>
+            <a:endParaRPr lang="ko-KR" altLang="en-US"/>
+          </a:p>
+        </p:txBody>
+      </p:sp>
+      <p:sp>
+        <p:nvSpPr>
+          <p:cNvPr id="5" name="Text 3">
+            <a:extLst>
+              <a:ext uri="{FF2B5EF4-FFF2-40B4-BE49-F238E27FC236}">
+                <a16:creationId xmlns:a16="http://schemas.microsoft.com/office/drawing/2014/main" id="{D744F61E-1880-06F0-285B-0DDCC40808D2}"/>
+              </a:ext>
+            </a:extLst>
+          </p:cNvPr>
+          <p:cNvSpPr/>
+          <p:nvPr/>
+        </p:nvSpPr>
+        <p:spPr>
+          <a:xfrm>
+            <a:off x="320040" y="109728"/>
+            <a:ext cx="457200" cy="420624"/>
+          </a:xfrm>
+          <a:prstGeom prst="rect">
+            <a:avLst/>
+          </a:prstGeom>
+          <a:noFill/>
+          <a:ln/>
+        </p:spPr>
+        <p:txBody>
+          <a:bodyPr wrap="square" rtlCol="0" anchor="ctr"/>
+          <a:lstStyle/>
+          <a:p>
+            <a:pPr marL="0" indent="0" algn="ctr">
+              <a:buNone/>
+            </a:pPr>
+            <a:r>
+              <a:rPr lang="en-US" sz="2200" dirty="0">
+                <a:solidFill>
+                  <a:srgbClr val="000000"/>
+                </a:solidFill>
+                <a:latin typeface="Arial" pitchFamily="34" charset="0"/>
+                <a:ea typeface="Arial" pitchFamily="34" charset="-122"/>
+                <a:cs typeface="Arial" pitchFamily="34" charset="-120"/>
+              </a:rPr>
+              <a:t>🎯</a:t>
+            </a:r>
+            <a:endParaRPr lang="en-US" sz="2200" dirty="0"/>
+          </a:p>
+        </p:txBody>
+      </p:sp>
+      <p:sp>
+        <p:nvSpPr>
+          <p:cNvPr id="6" name="Text 4">
+            <a:extLst>
+              <a:ext uri="{FF2B5EF4-FFF2-40B4-BE49-F238E27FC236}">
+                <a16:creationId xmlns:a16="http://schemas.microsoft.com/office/drawing/2014/main" id="{E5B649CC-B2C5-209F-05C9-5980FA3F16FB}"/>
+              </a:ext>
+            </a:extLst>
+          </p:cNvPr>
+          <p:cNvSpPr/>
+          <p:nvPr/>
+        </p:nvSpPr>
+        <p:spPr>
+          <a:xfrm>
+            <a:off x="777240" y="109728"/>
+            <a:ext cx="7132320" cy="420624"/>
+          </a:xfrm>
+          <a:prstGeom prst="rect">
+            <a:avLst/>
+          </a:prstGeom>
+          <a:noFill/>
+          <a:ln/>
+        </p:spPr>
+        <p:txBody>
+          <a:bodyPr wrap="square" rtlCol="0" anchor="ctr"/>
+          <a:lstStyle/>
+          <a:p>
+            <a:pPr marL="0" indent="0" algn="l">
+              <a:buNone/>
+            </a:pPr>
+            <a:r>
+              <a:rPr lang="en-US" sz="2800" b="1" dirty="0">
+                <a:solidFill>
+                  <a:srgbClr val="FFFFFF"/>
+                </a:solidFill>
+                <a:latin typeface="맑은 고딕" pitchFamily="34" charset="0"/>
+                <a:ea typeface="맑은 고딕" pitchFamily="34" charset="-122"/>
+                <a:cs typeface="맑은 고딕" pitchFamily="34" charset="-120"/>
+              </a:rPr>
+              <a:t>자료형 퀴즈</a:t>
+            </a:r>
+            <a:endParaRPr lang="en-US" sz="2800" dirty="0"/>
+          </a:p>
+        </p:txBody>
+      </p:sp>
+      <p:sp>
+        <p:nvSpPr>
+          <p:cNvPr id="7" name="Shape 5">
+            <a:extLst>
+              <a:ext uri="{FF2B5EF4-FFF2-40B4-BE49-F238E27FC236}">
+                <a16:creationId xmlns:a16="http://schemas.microsoft.com/office/drawing/2014/main" id="{709129F8-7064-6C9A-C36A-CA8CCF79A222}"/>
+              </a:ext>
+            </a:extLst>
+          </p:cNvPr>
+          <p:cNvSpPr/>
+          <p:nvPr/>
+        </p:nvSpPr>
+        <p:spPr>
+          <a:xfrm>
+            <a:off x="7955280" y="91440"/>
+            <a:ext cx="1005840" cy="320040"/>
+          </a:xfrm>
+          <a:prstGeom prst="roundRect">
+            <a:avLst>
+              <a:gd name="adj" fmla="val 34286"/>
+            </a:avLst>
+          </a:prstGeom>
+          <a:solidFill>
+            <a:srgbClr val="A78BFA"/>
+          </a:solidFill>
+          <a:ln w="12700">
+            <a:solidFill>
+              <a:srgbClr val="A78BFA"/>
+            </a:solidFill>
+            <a:prstDash val="solid"/>
+          </a:ln>
+        </p:spPr>
+        <p:txBody>
+          <a:bodyPr/>
+          <a:lstStyle/>
+          <a:p>
+            <a:endParaRPr lang="ko-KR" altLang="en-US"/>
+          </a:p>
+        </p:txBody>
+      </p:sp>
+      <p:sp>
+        <p:nvSpPr>
+          <p:cNvPr id="8" name="Text 6">
+            <a:extLst>
+              <a:ext uri="{FF2B5EF4-FFF2-40B4-BE49-F238E27FC236}">
+                <a16:creationId xmlns:a16="http://schemas.microsoft.com/office/drawing/2014/main" id="{0F569752-7D51-33B9-B9EF-A5BE3DE005E5}"/>
+              </a:ext>
+            </a:extLst>
+          </p:cNvPr>
+          <p:cNvSpPr/>
+          <p:nvPr/>
+        </p:nvSpPr>
+        <p:spPr>
+          <a:xfrm>
+            <a:off x="7955280" y="109728"/>
+            <a:ext cx="1005840" cy="274320"/>
+          </a:xfrm>
+          <a:prstGeom prst="rect">
+            <a:avLst/>
+          </a:prstGeom>
+          <a:noFill/>
+          <a:ln/>
+        </p:spPr>
+        <p:txBody>
+          <a:bodyPr wrap="square" rtlCol="0" anchor="ctr"/>
+          <a:lstStyle/>
+          <a:p>
+            <a:pPr marL="0" indent="0" algn="ctr">
+              <a:buNone/>
+            </a:pPr>
+            <a:r>
+              <a:rPr lang="en-US" sz="1200" b="1" dirty="0">
+                <a:solidFill>
+                  <a:srgbClr val="FFFFFF"/>
+                </a:solidFill>
+                <a:latin typeface="맑은 고딕" pitchFamily="34" charset="0"/>
+                <a:ea typeface="맑은 고딕" pitchFamily="34" charset="-122"/>
+                <a:cs typeface="맑은 고딕" pitchFamily="34" charset="-120"/>
+              </a:rPr>
+              <a:t>3주차</a:t>
+            </a:r>
+            <a:endParaRPr lang="en-US" sz="1200" dirty="0"/>
+          </a:p>
+        </p:txBody>
+      </p:sp>
+      <p:sp>
+        <p:nvSpPr>
+          <p:cNvPr id="9" name="Shape 7">
+            <a:extLst>
+              <a:ext uri="{FF2B5EF4-FFF2-40B4-BE49-F238E27FC236}">
+                <a16:creationId xmlns:a16="http://schemas.microsoft.com/office/drawing/2014/main" id="{E08F318A-1765-0964-447B-8D92F09146B4}"/>
+              </a:ext>
+            </a:extLst>
+          </p:cNvPr>
+          <p:cNvSpPr/>
+          <p:nvPr/>
+        </p:nvSpPr>
+        <p:spPr>
+          <a:xfrm>
+            <a:off x="457200" y="822960"/>
+            <a:ext cx="8229600" cy="548640"/>
+          </a:xfrm>
+          <a:prstGeom prst="roundRect">
+            <a:avLst>
+              <a:gd name="adj" fmla="val 16667"/>
+            </a:avLst>
+          </a:prstGeom>
+          <a:solidFill>
+            <a:srgbClr val="A78BFA">
+              <a:alpha val="15000"/>
+            </a:srgbClr>
+          </a:solidFill>
+          <a:ln w="12700">
+            <a:solidFill>
+              <a:srgbClr val="A78BFA"/>
+            </a:solidFill>
+            <a:prstDash val="solid"/>
+          </a:ln>
+        </p:spPr>
+        <p:txBody>
+          <a:bodyPr/>
+          <a:lstStyle/>
+          <a:p>
+            <a:endParaRPr lang="ko-KR" altLang="en-US"/>
+          </a:p>
+        </p:txBody>
+      </p:sp>
+      <p:sp>
+        <p:nvSpPr>
+          <p:cNvPr id="10" name="Text 8">
+            <a:extLst>
+              <a:ext uri="{FF2B5EF4-FFF2-40B4-BE49-F238E27FC236}">
+                <a16:creationId xmlns:a16="http://schemas.microsoft.com/office/drawing/2014/main" id="{3DB6C53A-D1C8-3F17-6909-5165A0734444}"/>
+              </a:ext>
+            </a:extLst>
+          </p:cNvPr>
+          <p:cNvSpPr/>
+          <p:nvPr/>
+        </p:nvSpPr>
+        <p:spPr>
+          <a:xfrm>
+            <a:off x="640080" y="896112"/>
+            <a:ext cx="7863840" cy="365760"/>
+          </a:xfrm>
+          <a:prstGeom prst="rect">
+            <a:avLst/>
+          </a:prstGeom>
+          <a:noFill/>
+          <a:ln/>
+        </p:spPr>
+        <p:txBody>
+          <a:bodyPr wrap="square" rtlCol="0" anchor="ctr"/>
+          <a:lstStyle/>
+          <a:p>
+            <a:pPr marL="0" indent="0" algn="ctr">
+              <a:buNone/>
+            </a:pPr>
+            <a:r>
+              <a:rPr lang="en-US" sz="1800" b="1" dirty="0">
+                <a:solidFill>
+                  <a:srgbClr val="3B0764"/>
+                </a:solidFill>
+                <a:latin typeface="맑은 고딕" pitchFamily="34" charset="0"/>
+                <a:ea typeface="맑은 고딕" pitchFamily="34" charset="-122"/>
+                <a:cs typeface="맑은 고딕" pitchFamily="34" charset="-120"/>
+              </a:rPr>
+              <a:t>상황에 </a:t>
+            </a:r>
+            <a:r>
+              <a:rPr lang="en-US" sz="1800" b="1" dirty="0" err="1">
+                <a:solidFill>
+                  <a:srgbClr val="3B0764"/>
+                </a:solidFill>
+                <a:latin typeface="맑은 고딕" pitchFamily="34" charset="0"/>
+                <a:ea typeface="맑은 고딕" pitchFamily="34" charset="-122"/>
+                <a:cs typeface="맑은 고딕" pitchFamily="34" charset="-120"/>
+              </a:rPr>
+              <a:t>맞는</a:t>
+            </a:r>
+            <a:r>
+              <a:rPr lang="en-US" sz="1800" b="1" dirty="0">
+                <a:solidFill>
+                  <a:srgbClr val="3B0764"/>
+                </a:solidFill>
+                <a:latin typeface="맑은 고딕" pitchFamily="34" charset="0"/>
+                <a:ea typeface="맑은 고딕" pitchFamily="34" charset="-122"/>
+                <a:cs typeface="맑은 고딕" pitchFamily="34" charset="-120"/>
+              </a:rPr>
+              <a:t> python </a:t>
+            </a:r>
+            <a:r>
+              <a:rPr lang="en-US" sz="1800" b="1" dirty="0" err="1">
+                <a:solidFill>
+                  <a:srgbClr val="3B0764"/>
+                </a:solidFill>
+                <a:latin typeface="맑은 고딕" pitchFamily="34" charset="0"/>
+                <a:ea typeface="맑은 고딕" pitchFamily="34" charset="-122"/>
+                <a:cs typeface="맑은 고딕" pitchFamily="34" charset="-120"/>
+              </a:rPr>
+              <a:t>자료형을</a:t>
+            </a:r>
+            <a:r>
+              <a:rPr lang="en-US" sz="1800" b="1" dirty="0">
+                <a:solidFill>
+                  <a:srgbClr val="3B0764"/>
+                </a:solidFill>
+                <a:latin typeface="맑은 고딕" pitchFamily="34" charset="0"/>
+                <a:ea typeface="맑은 고딕" pitchFamily="34" charset="-122"/>
+                <a:cs typeface="맑은 고딕" pitchFamily="34" charset="-120"/>
+              </a:rPr>
+              <a:t> 골라봐요!</a:t>
+            </a:r>
+            <a:endParaRPr lang="en-US" sz="1800" dirty="0"/>
+          </a:p>
+        </p:txBody>
+      </p:sp>
+      <p:sp>
+        <p:nvSpPr>
+          <p:cNvPr id="11" name="Text 9">
+            <a:extLst>
+              <a:ext uri="{FF2B5EF4-FFF2-40B4-BE49-F238E27FC236}">
+                <a16:creationId xmlns:a16="http://schemas.microsoft.com/office/drawing/2014/main" id="{C80D4767-3B54-5A2D-402A-A15726CADD08}"/>
+              </a:ext>
+            </a:extLst>
+          </p:cNvPr>
+          <p:cNvSpPr/>
+          <p:nvPr/>
+        </p:nvSpPr>
+        <p:spPr>
+          <a:xfrm>
+            <a:off x="640080" y="1554480"/>
+            <a:ext cx="7863840" cy="2834640"/>
+          </a:xfrm>
+          <a:prstGeom prst="rect">
+            <a:avLst/>
+          </a:prstGeom>
+          <a:noFill/>
+          <a:ln/>
+        </p:spPr>
+        <p:txBody>
+          <a:bodyPr wrap="square" lIns="254" tIns="254" rIns="254" bIns="254" rtlCol="0" anchor="t">
+            <a:normAutofit fontScale="25000" lnSpcReduction="20000"/>
+          </a:bodyPr>
+          <a:lstStyle/>
+          <a:p>
+            <a:pPr marL="285750" indent="-285750">
+              <a:buFont typeface="Arial" panose="020B0604020202020204" pitchFamily="34" charset="0"/>
+              <a:buChar char="•"/>
+            </a:pPr>
+            <a:r>
+              <a:rPr lang="en-US" sz="6400" dirty="0">
+                <a:solidFill>
+                  <a:srgbClr val="3B0764"/>
+                </a:solidFill>
+                <a:latin typeface="맑은 고딕" pitchFamily="34" charset="0"/>
+                <a:ea typeface="맑은 고딕" pitchFamily="34" charset="-122"/>
+                <a:cs typeface="맑은 고딕" pitchFamily="34" charset="-120"/>
+              </a:rPr>
+              <a:t>Q1. </a:t>
+            </a:r>
+            <a:r>
+              <a:rPr lang="ko-KR" altLang="en-US" sz="6400" dirty="0">
+                <a:solidFill>
+                  <a:srgbClr val="3B0764"/>
+                </a:solidFill>
+                <a:latin typeface="맑은 고딕" pitchFamily="34" charset="0"/>
+                <a:ea typeface="맑은 고딕" pitchFamily="34" charset="-122"/>
+                <a:cs typeface="맑은 고딕" pitchFamily="34" charset="-120"/>
+              </a:rPr>
+              <a:t>문제</a:t>
+            </a:r>
+            <a:r>
+              <a:rPr lang="en-US" altLang="ko-KR" sz="6400" dirty="0">
+                <a:solidFill>
+                  <a:srgbClr val="3B0764"/>
+                </a:solidFill>
+                <a:latin typeface="맑은 고딕" pitchFamily="34" charset="0"/>
+                <a:ea typeface="맑은 고딕" pitchFamily="34" charset="-122"/>
+                <a:cs typeface="맑은 고딕" pitchFamily="34" charset="-120"/>
+              </a:rPr>
+              <a:t>:</a:t>
+            </a:r>
+            <a:r>
+              <a:rPr lang="ko-KR" altLang="en-US" sz="6400" dirty="0"/>
+              <a:t> 다음 값을 변수에 저장하려고 합니다</a:t>
+            </a:r>
+            <a:r>
+              <a:rPr lang="en-US" altLang="ko-KR" sz="6400" dirty="0"/>
+              <a:t>.</a:t>
+            </a:r>
+          </a:p>
+          <a:p>
+            <a:r>
+              <a:rPr lang="ko-KR" altLang="en-US" sz="6400" dirty="0"/>
+              <a:t>따옴표</a:t>
+            </a:r>
+            <a:r>
+              <a:rPr lang="en-US" altLang="ko-KR" sz="6400" dirty="0"/>
+              <a:t>("")</a:t>
+            </a:r>
+            <a:r>
+              <a:rPr lang="ko-KR" altLang="en-US" sz="6400" dirty="0"/>
+              <a:t>가 필요하면 ○</a:t>
+            </a:r>
+            <a:r>
+              <a:rPr lang="en-US" altLang="ko-KR" sz="6400" dirty="0"/>
+              <a:t>, </a:t>
+            </a:r>
+            <a:r>
+              <a:rPr lang="ko-KR" altLang="en-US" sz="6400" dirty="0" err="1"/>
+              <a:t>필요없으면</a:t>
+            </a:r>
+            <a:r>
+              <a:rPr lang="ko-KR" altLang="en-US" sz="6400" dirty="0"/>
+              <a:t> ✕ 하세요</a:t>
+            </a:r>
+          </a:p>
+          <a:p>
+            <a:pPr marL="285750" indent="-285750">
+              <a:buFont typeface="Arial" panose="020B0604020202020204" pitchFamily="34" charset="0"/>
+              <a:buChar char="•"/>
+            </a:pPr>
+            <a:endParaRPr lang="en-US" sz="6400" dirty="0">
+              <a:solidFill>
+                <a:srgbClr val="3B0764"/>
+              </a:solidFill>
+              <a:latin typeface="맑은 고딕" pitchFamily="34" charset="0"/>
+              <a:ea typeface="맑은 고딕" pitchFamily="34" charset="-122"/>
+              <a:cs typeface="맑은 고딕" pitchFamily="34" charset="-120"/>
+            </a:endParaRPr>
+          </a:p>
+          <a:p>
+            <a:r>
+              <a:rPr lang="en-US" altLang="ko-KR" sz="6400" dirty="0"/>
+              <a:t> name = </a:t>
+            </a:r>
+            <a:r>
+              <a:rPr lang="ko-KR" altLang="en-US" sz="6400" dirty="0"/>
+              <a:t>홍길동        </a:t>
+            </a:r>
+            <a:r>
+              <a:rPr lang="en-US" altLang="ko-KR" sz="6400" dirty="0"/>
+              <a:t>(  )</a:t>
+            </a:r>
+          </a:p>
+          <a:p>
+            <a:r>
+              <a:rPr lang="en-US" altLang="ko-KR" sz="6400" dirty="0"/>
+              <a:t>age = 12             (  )</a:t>
+            </a:r>
+          </a:p>
+          <a:p>
+            <a:r>
+              <a:rPr lang="en-US" altLang="ko-KR" sz="6400" dirty="0"/>
+              <a:t>ban = 3</a:t>
+            </a:r>
+            <a:r>
+              <a:rPr lang="ko-KR" altLang="en-US" sz="6400" dirty="0"/>
+              <a:t>학년 </a:t>
+            </a:r>
+            <a:r>
+              <a:rPr lang="en-US" altLang="ko-KR" sz="6400" dirty="0"/>
+              <a:t>2</a:t>
+            </a:r>
+            <a:r>
+              <a:rPr lang="ko-KR" altLang="en-US" sz="6400" dirty="0"/>
+              <a:t>반      </a:t>
+            </a:r>
+            <a:r>
+              <a:rPr lang="en-US" altLang="ko-KR" sz="6400" dirty="0"/>
+              <a:t>(  )</a:t>
+            </a:r>
+          </a:p>
+          <a:p>
+            <a:r>
+              <a:rPr lang="en-US" altLang="ko-KR" sz="6400" dirty="0"/>
+              <a:t>height = 152.5       (  )</a:t>
+            </a:r>
+          </a:p>
+          <a:p>
+            <a:r>
+              <a:rPr lang="en-US" altLang="ko-KR" sz="6400" dirty="0"/>
+              <a:t>phone = 010-1234-5678 (  )</a:t>
+            </a:r>
+          </a:p>
+          <a:p>
+            <a:pPr marL="285750" indent="-285750">
+              <a:buFont typeface="Arial" panose="020B0604020202020204" pitchFamily="34" charset="0"/>
+              <a:buChar char="•"/>
+            </a:pPr>
+            <a:endParaRPr lang="en-US" sz="6400" dirty="0">
+              <a:solidFill>
+                <a:srgbClr val="3B0764"/>
+              </a:solidFill>
+              <a:latin typeface="맑은 고딕" pitchFamily="34" charset="0"/>
+              <a:ea typeface="맑은 고딕" pitchFamily="34" charset="-122"/>
+              <a:cs typeface="맑은 고딕" pitchFamily="34" charset="-120"/>
+            </a:endParaRPr>
+          </a:p>
+          <a:p>
+            <a:endParaRPr lang="en-US" altLang="ko-KR" sz="6400" dirty="0"/>
+          </a:p>
+          <a:p>
+            <a:pPr marL="285750" indent="-285750">
+              <a:buFont typeface="Arial" panose="020B0604020202020204" pitchFamily="34" charset="0"/>
+              <a:buChar char="•"/>
+            </a:pPr>
+            <a:r>
+              <a:rPr lang="en-US" altLang="ko-KR" sz="6400" dirty="0">
+                <a:solidFill>
+                  <a:srgbClr val="3B0764"/>
+                </a:solidFill>
+                <a:latin typeface="맑은 고딕" pitchFamily="34" charset="0"/>
+                <a:ea typeface="맑은 고딕" pitchFamily="34" charset="-122"/>
+                <a:cs typeface="맑은 고딕" pitchFamily="34" charset="-120"/>
+              </a:rPr>
+              <a:t>Q2. </a:t>
+            </a:r>
+            <a:r>
+              <a:rPr lang="ko-KR" altLang="en-US" sz="6400" dirty="0"/>
+              <a:t>문제</a:t>
+            </a:r>
+            <a:r>
+              <a:rPr lang="en-US" altLang="ko-KR" sz="6400" dirty="0"/>
+              <a:t>: </a:t>
+            </a:r>
+            <a:r>
+              <a:rPr lang="ko-KR" altLang="en-US" sz="6400" dirty="0"/>
+              <a:t>이 코드를 실행하면 뭐가 나올까요</a:t>
+            </a:r>
+            <a:r>
+              <a:rPr lang="en-US" altLang="ko-KR" sz="6400" dirty="0"/>
+              <a:t>?</a:t>
+            </a:r>
+          </a:p>
+          <a:p>
+            <a:endParaRPr lang="en-US" altLang="ko-KR" sz="6400" dirty="0"/>
+          </a:p>
+          <a:p>
+            <a:r>
+              <a:rPr lang="en-US" altLang="ko-KR" sz="6400" dirty="0"/>
+              <a:t>a = "7"</a:t>
+            </a:r>
+          </a:p>
+          <a:p>
+            <a:r>
+              <a:rPr lang="en-US" altLang="ko-KR" sz="6400" dirty="0"/>
+              <a:t>b = "3"</a:t>
+            </a:r>
+          </a:p>
+          <a:p>
+            <a:r>
+              <a:rPr lang="en-US" altLang="ko-KR" sz="6400" dirty="0"/>
+              <a:t>print(a + b)</a:t>
+            </a:r>
+          </a:p>
+          <a:p>
+            <a:br>
+              <a:rPr lang="ko-KR" altLang="en-US" sz="1600" dirty="0"/>
+            </a:br>
+            <a:endParaRPr lang="en-US" sz="1600" dirty="0"/>
+          </a:p>
+        </p:txBody>
+      </p:sp>
+      <p:sp>
+        <p:nvSpPr>
+          <p:cNvPr id="13" name="Text 10">
+            <a:extLst>
+              <a:ext uri="{FF2B5EF4-FFF2-40B4-BE49-F238E27FC236}">
+                <a16:creationId xmlns:a16="http://schemas.microsoft.com/office/drawing/2014/main" id="{3F2802C5-969C-7083-C31B-DD716F7AE28E}"/>
+              </a:ext>
+            </a:extLst>
+          </p:cNvPr>
+          <p:cNvSpPr/>
+          <p:nvPr/>
+        </p:nvSpPr>
+        <p:spPr>
+          <a:xfrm>
+            <a:off x="274320" y="4800600"/>
+            <a:ext cx="2286000" cy="274320"/>
+          </a:xfrm>
+          <a:prstGeom prst="rect">
+            <a:avLst/>
+          </a:prstGeom>
+          <a:noFill/>
+          <a:ln/>
+        </p:spPr>
+        <p:txBody>
+          <a:bodyPr wrap="square" rtlCol="0" anchor="b"/>
+          <a:lstStyle/>
+          <a:p>
+            <a:pPr marL="0" indent="0" algn="l">
+              <a:buNone/>
+            </a:pPr>
+            <a:r>
+              <a:rPr lang="en-US" sz="900" dirty="0">
+                <a:solidFill>
+                  <a:srgbClr val="A0AEC0"/>
+                </a:solidFill>
+                <a:latin typeface="맑은 고딕" pitchFamily="34" charset="0"/>
+                <a:ea typeface="맑은 고딕" pitchFamily="34" charset="-122"/>
+                <a:cs typeface="맑은 고딕" pitchFamily="34" charset="-120"/>
+              </a:rPr>
+              <a:t>드론 코딩 교실</a:t>
+            </a:r>
+            <a:endParaRPr lang="en-US" sz="900" dirty="0"/>
+          </a:p>
+        </p:txBody>
+      </p:sp>
+      <p:sp>
+        <p:nvSpPr>
+          <p:cNvPr id="14" name="Text 11">
+            <a:extLst>
+              <a:ext uri="{FF2B5EF4-FFF2-40B4-BE49-F238E27FC236}">
+                <a16:creationId xmlns:a16="http://schemas.microsoft.com/office/drawing/2014/main" id="{65B4E8D0-E80B-B97B-F8EF-FAE480C5160B}"/>
+              </a:ext>
+            </a:extLst>
+          </p:cNvPr>
+          <p:cNvSpPr/>
+          <p:nvPr/>
+        </p:nvSpPr>
+        <p:spPr>
+          <a:xfrm>
+            <a:off x="6858000" y="4800600"/>
+            <a:ext cx="2011680" cy="274320"/>
+          </a:xfrm>
+          <a:prstGeom prst="rect">
+            <a:avLst/>
+          </a:prstGeom>
+          <a:noFill/>
+          <a:ln/>
+        </p:spPr>
+        <p:txBody>
+          <a:bodyPr wrap="square" rtlCol="0" anchor="b"/>
+          <a:lstStyle/>
+          <a:p>
+            <a:pPr marL="0" indent="0" algn="r">
+              <a:buNone/>
+            </a:pPr>
+            <a:r>
+              <a:rPr lang="en-US" sz="900" dirty="0">
+                <a:solidFill>
+                  <a:srgbClr val="A0AEC0"/>
+                </a:solidFill>
+                <a:latin typeface="맑은 고딕" pitchFamily="34" charset="0"/>
+                <a:ea typeface="맑은 고딕" pitchFamily="34" charset="-122"/>
+                <a:cs typeface="맑은 고딕" pitchFamily="34" charset="-120"/>
+              </a:rPr>
+              <a:t>17 / 17</a:t>
+            </a:r>
+            <a:endParaRPr lang="en-US" sz="900" dirty="0"/>
+          </a:p>
+        </p:txBody>
+      </p:sp>
+    </p:spTree>
+    <p:extLst>
+      <p:ext uri="{BB962C8B-B14F-4D97-AF65-F5344CB8AC3E}">
+        <p14:creationId xmlns:p14="http://schemas.microsoft.com/office/powerpoint/2010/main" val="1300051598"/>
+      </p:ext>
+    </p:extLst>
+  </p:cSld>
+  <p:clrMapOvr>
+    <a:masterClrMapping/>
+  </p:clrMapOvr>
+</p:sld>
+</file>
+
 <file path=ppt/slides/slide3.xml><?xml version="1.0" encoding="utf-8"?>
 <p:sld xmlns:a="http://schemas.openxmlformats.org/drawingml/2006/main" xmlns:r="http://schemas.openxmlformats.org/officeDocument/2006/relationships" xmlns:p="http://schemas.openxmlformats.org/presentationml/2006/main">
   <p:cSld name="Slide 4">
@@ -16249,61 +17158,6 @@
               </a:rPr>
               <a:t>롤(Roll)</a:t>
             </a:r>
-            <a:r>
-              <a:rPr lang="en-US" altLang="ko-KR" sz="2800" b="1" dirty="0">
-                <a:solidFill>
-                  <a:srgbClr val="FFFFFF"/>
-                </a:solidFill>
-                <a:latin typeface="맑은 고딕" pitchFamily="34" charset="0"/>
-                <a:ea typeface="맑은 고딕" pitchFamily="34" charset="-122"/>
-                <a:cs typeface="맑은 고딕" pitchFamily="34" charset="-120"/>
-              </a:rPr>
-              <a:t>,</a:t>
-            </a:r>
-            <a:r>
-              <a:rPr lang="ko-KR" altLang="en-US" sz="2800" b="1" dirty="0">
-                <a:solidFill>
-                  <a:srgbClr val="FFFFFF"/>
-                </a:solidFill>
-                <a:latin typeface="맑은 고딕" pitchFamily="34" charset="0"/>
-                <a:ea typeface="맑은 고딕" pitchFamily="34" charset="-122"/>
-                <a:cs typeface="맑은 고딕" pitchFamily="34" charset="-120"/>
-              </a:rPr>
-              <a:t> 피치</a:t>
-            </a:r>
-            <a:r>
-              <a:rPr lang="en-US" altLang="ko-KR" sz="2800" b="1" dirty="0">
-                <a:solidFill>
-                  <a:srgbClr val="FFFFFF"/>
-                </a:solidFill>
-                <a:latin typeface="맑은 고딕" pitchFamily="34" charset="0"/>
-                <a:ea typeface="맑은 고딕" pitchFamily="34" charset="-122"/>
-                <a:cs typeface="맑은 고딕" pitchFamily="34" charset="-120"/>
-              </a:rPr>
-              <a:t>(Pitch),</a:t>
-            </a:r>
-            <a:r>
-              <a:rPr lang="ko-KR" altLang="en-US" sz="2800" b="1" dirty="0">
-                <a:solidFill>
-                  <a:srgbClr val="FFFFFF"/>
-                </a:solidFill>
-                <a:latin typeface="맑은 고딕" pitchFamily="34" charset="0"/>
-                <a:ea typeface="맑은 고딕" pitchFamily="34" charset="-122"/>
-                <a:cs typeface="맑은 고딕" pitchFamily="34" charset="-120"/>
-              </a:rPr>
-              <a:t> 요</a:t>
-            </a:r>
-            <a:r>
-              <a:rPr lang="en-US" altLang="ko-KR" sz="2800" b="1" dirty="0">
-                <a:solidFill>
-                  <a:srgbClr val="FFFFFF"/>
-                </a:solidFill>
-                <a:latin typeface="맑은 고딕" pitchFamily="34" charset="0"/>
-                <a:ea typeface="맑은 고딕" pitchFamily="34" charset="-122"/>
-                <a:cs typeface="맑은 고딕" pitchFamily="34" charset="-120"/>
-              </a:rPr>
-              <a:t>(Yaw)</a:t>
-            </a:r>
             <a:endParaRPr lang="en-US" sz="2800" dirty="0"/>
           </a:p>
         </p:txBody>
@@ -16542,42 +17396,17 @@
               <a:buChar char="•"/>
             </a:pPr>
             <a:r>
-              <a:rPr lang="ko-KR" altLang="en-US" sz="1600" dirty="0">
+              <a:rPr lang="en-US" sz="1600" dirty="0">
                 <a:solidFill>
                   <a:srgbClr val="3B0764"/>
                 </a:solidFill>
                 <a:latin typeface="맑은 고딕" pitchFamily="34" charset="0"/>
                 <a:ea typeface="맑은 고딕" pitchFamily="34" charset="-122"/>
-              </a:rPr>
-              <a:t>피치</a:t>
-            </a:r>
-            <a:r>
-              <a:rPr lang="en-US" altLang="ko-KR" sz="1600" dirty="0">
-                <a:solidFill>
-                  <a:srgbClr val="3B0764"/>
-                </a:solidFill>
-                <a:latin typeface="맑은 고딕" pitchFamily="34" charset="0"/>
-                <a:ea typeface="맑은 고딕" pitchFamily="34" charset="-122"/>
-              </a:rPr>
-              <a:t>(Pitch) = </a:t>
-            </a:r>
-            <a:r>
-              <a:rPr lang="ko-KR" altLang="en-US" sz="1600" dirty="0">
-                <a:solidFill>
-                  <a:srgbClr val="3B0764"/>
-                </a:solidFill>
-                <a:latin typeface="맑은 고딕" pitchFamily="34" charset="0"/>
-                <a:ea typeface="맑은 고딕" pitchFamily="34" charset="-122"/>
-              </a:rPr>
-              <a:t>앞뒤 기울기</a:t>
-            </a:r>
-            <a:endParaRPr lang="en-US" altLang="ko-KR" sz="1600" dirty="0">
-              <a:solidFill>
-                <a:srgbClr val="3B0764"/>
-              </a:solidFill>
-              <a:latin typeface="맑은 고딕" pitchFamily="34" charset="0"/>
-              <a:ea typeface="맑은 고딕" pitchFamily="34" charset="-122"/>
-            </a:endParaRPr>
+                <a:cs typeface="맑은 고딕" pitchFamily="34" charset="-120"/>
+              </a:rPr>
+              <a:t>오른쪽 롤: 오른쪽 프로펠러 느리게 → 오른쪽으로 기울어져 이동</a:t>
+            </a:r>
+            <a:endParaRPr lang="en-US" sz="1600" dirty="0"/>
           </a:p>
           <a:p>
             <a:pPr marL="203200" indent="-203200">
@@ -16591,16 +17420,63 @@
               <a:buChar char="•"/>
             </a:pPr>
             <a:r>
-              <a:rPr lang="ko-KR" altLang="en-US" sz="1600" dirty="0"/>
-              <a:t>요</a:t>
-            </a:r>
-            <a:r>
-              <a:rPr lang="en-US" altLang="ko-KR" sz="1600" dirty="0"/>
-              <a:t>(Yaw) = </a:t>
-            </a:r>
-            <a:r>
-              <a:rPr lang="ko-KR" altLang="en-US" sz="1600" dirty="0"/>
-              <a:t>제자리 회전</a:t>
+              <a:rPr lang="en-US" sz="1600" dirty="0">
+                <a:solidFill>
+                  <a:srgbClr val="3B0764"/>
+                </a:solidFill>
+                <a:latin typeface="맑은 고딕" pitchFamily="34" charset="0"/>
+                <a:ea typeface="맑은 고딕" pitchFamily="34" charset="-122"/>
+                <a:cs typeface="맑은 고딕" pitchFamily="34" charset="-120"/>
+              </a:rPr>
+              <a:t>왼쪽 롤: 왼쪽 프로펠러 느리게 → 왼쪽으로 기울어져 이동</a:t>
+            </a:r>
+            <a:endParaRPr lang="en-US" sz="1600" dirty="0"/>
+          </a:p>
+          <a:p>
+            <a:pPr marL="203200" indent="-203200">
+              <a:lnSpc>
+                <a:spcPct val="130000"/>
+              </a:lnSpc>
+              <a:spcAft>
+                <a:spcPts val="1000"/>
+              </a:spcAft>
+              <a:buSzPct val="100000"/>
+              <a:buChar char="•"/>
+            </a:pPr>
+            <a:r>
+              <a:rPr lang="en-US" sz="1600" dirty="0">
+                <a:solidFill>
+                  <a:srgbClr val="3B0764"/>
+                </a:solidFill>
+                <a:latin typeface="맑은 고딕" pitchFamily="34" charset="0"/>
+                <a:ea typeface="맑은 고딕" pitchFamily="34" charset="-122"/>
+                <a:cs typeface="맑은 고딕" pitchFamily="34" charset="-120"/>
+              </a:rPr>
+              <a:t>비행기가 방향 바꿀 때 날개가 기울어지는 것과 같아요</a:t>
+            </a:r>
+            <a:endParaRPr lang="en-US" sz="1600" dirty="0"/>
+          </a:p>
+          <a:p>
+            <a:pPr marL="203200" indent="-203200">
+              <a:lnSpc>
+                <a:spcPct val="130000"/>
+              </a:lnSpc>
+              <a:spcAft>
+                <a:spcPts val="1000"/>
+              </a:spcAft>
+              <a:buSzPct val="100000"/>
+              <a:buChar char="•"/>
+            </a:pPr>
+            <a:r>
+              <a:rPr lang="en-US" sz="1600" dirty="0">
+                <a:solidFill>
+                  <a:srgbClr val="3B0764"/>
+                </a:solidFill>
+                <a:latin typeface="맑은 고딕" pitchFamily="34" charset="0"/>
+                <a:ea typeface="맑은 고딕" pitchFamily="34" charset="-122"/>
+                <a:cs typeface="맑은 고딕" pitchFamily="34" charset="-120"/>
+              </a:rPr>
+              <a:t>조종기 오른쪽 스틱 좌우 = 롤</a:t>
             </a:r>
             <a:endParaRPr lang="en-US" sz="1600" dirty="0"/>
           </a:p>
